--- a/환경경제학/2026-1/환경경제학_Chapter_05.pptx
+++ b/환경경제학/2026-1/환경경제학_Chapter_05.pptx
@@ -232,7 +232,7 @@
           <a:p>
             <a:fld id="{4A5E00EF-AEA4-43E2-9451-8F9C59A39471}" type="datetimeFigureOut">
               <a:rPr lang="ko-KR" altLang="en-US" smtClean="0"/>
-              <a:t>2026-09-17</a:t>
+              <a:t>2026-09-30</a:t>
             </a:fld>
             <a:endParaRPr lang="ko-KR" altLang="en-US"/>
           </a:p>
@@ -738,7 +738,7 @@
           <a:p>
             <a:fld id="{CD32C56F-BD27-4999-9E6D-D4EACE3DA9F4}" type="datetime1">
               <a:rPr lang="ko-KR" altLang="en-US" smtClean="0"/>
-              <a:t>2026-09-17</a:t>
+              <a:t>2026-09-30</a:t>
             </a:fld>
             <a:endParaRPr lang="ko-KR" altLang="en-US"/>
           </a:p>
@@ -952,7 +952,7 @@
           <a:p>
             <a:fld id="{8EF4A19C-72C8-45CA-8E3F-68A7FA345D6C}" type="datetime1">
               <a:rPr lang="ko-KR" altLang="en-US" smtClean="0"/>
-              <a:t>2026-09-17</a:t>
+              <a:t>2026-09-30</a:t>
             </a:fld>
             <a:endParaRPr lang="ko-KR" altLang="en-US"/>
           </a:p>
@@ -1176,7 +1176,7 @@
           <a:p>
             <a:fld id="{56A175B2-010B-4341-954C-5F8F5C70B124}" type="datetime1">
               <a:rPr lang="ko-KR" altLang="en-US" smtClean="0"/>
-              <a:t>2026-09-17</a:t>
+              <a:t>2026-09-30</a:t>
             </a:fld>
             <a:endParaRPr lang="ko-KR" altLang="en-US"/>
           </a:p>
@@ -1390,7 +1390,7 @@
           <a:p>
             <a:fld id="{16B83F9E-22C9-45CA-9E85-070F1D3EF530}" type="datetime1">
               <a:rPr lang="ko-KR" altLang="en-US" smtClean="0"/>
-              <a:t>2026-09-17</a:t>
+              <a:t>2026-09-30</a:t>
             </a:fld>
             <a:endParaRPr lang="ko-KR" altLang="en-US"/>
           </a:p>
@@ -1681,7 +1681,7 @@
           <a:p>
             <a:fld id="{03278F45-FB3C-4C4D-B89A-7BC3F5F229F6}" type="datetime1">
               <a:rPr lang="ko-KR" altLang="en-US" smtClean="0"/>
-              <a:t>2026-09-17</a:t>
+              <a:t>2026-09-30</a:t>
             </a:fld>
             <a:endParaRPr lang="ko-KR" altLang="en-US"/>
           </a:p>
@@ -2074,7 +2074,7 @@
           <a:p>
             <a:fld id="{38FDAC3C-35A6-415C-9F03-738A6AC328B1}" type="datetime1">
               <a:rPr lang="ko-KR" altLang="en-US" smtClean="0"/>
-              <a:t>2026-09-17</a:t>
+              <a:t>2026-09-30</a:t>
             </a:fld>
             <a:endParaRPr lang="ko-KR" altLang="en-US"/>
           </a:p>
@@ -3668,7 +3668,7 @@
           <a:p>
             <a:fld id="{507A0DF1-AEE6-4B0D-89D2-351E7B3EF65C}" type="datetime1">
               <a:rPr lang="ko-KR" altLang="en-US" smtClean="0"/>
-              <a:t>2026-09-17</a:t>
+              <a:t>2026-09-30</a:t>
             </a:fld>
             <a:endParaRPr lang="ko-KR" altLang="en-US"/>
           </a:p>
@@ -4096,7 +4096,7 @@
           <a:p>
             <a:fld id="{CA93B8C9-630F-4D57-944D-04FD37CECCD3}" type="datetime1">
               <a:rPr lang="ko-KR" altLang="en-US" smtClean="0"/>
-              <a:t>2026-09-17</a:t>
+              <a:t>2026-09-30</a:t>
             </a:fld>
             <a:endParaRPr lang="ko-KR" altLang="en-US"/>
           </a:p>
@@ -4253,7 +4253,7 @@
           <a:p>
             <a:fld id="{E986165A-AC43-4902-9541-874ECD310BA3}" type="datetime1">
               <a:rPr lang="ko-KR" altLang="en-US" smtClean="0"/>
-              <a:t>2026-09-17</a:t>
+              <a:t>2026-09-30</a:t>
             </a:fld>
             <a:endParaRPr lang="ko-KR" altLang="en-US"/>
           </a:p>
@@ -4580,7 +4580,7 @@
           <a:p>
             <a:fld id="{47E6EE6D-2B0E-43A9-87A2-7354CDB998F4}" type="datetime1">
               <a:rPr lang="ko-KR" altLang="en-US" smtClean="0"/>
-              <a:t>2026-09-17</a:t>
+              <a:t>2026-09-30</a:t>
             </a:fld>
             <a:endParaRPr lang="ko-KR" altLang="en-US"/>
           </a:p>
@@ -4884,7 +4884,7 @@
           <a:p>
             <a:fld id="{5CC5944E-0BC8-4FAA-9F94-6B4B05834E10}" type="datetime1">
               <a:rPr lang="ko-KR" altLang="en-US" smtClean="0"/>
-              <a:t>2026-09-17</a:t>
+              <a:t>2026-09-30</a:t>
             </a:fld>
             <a:endParaRPr lang="ko-KR" altLang="en-US"/>
           </a:p>
@@ -7454,10 +7454,10 @@
       </p:sp>
       <p:pic>
         <p:nvPicPr>
-          <p:cNvPr id="5" name="그림 4" descr="텍스트, 도표, 라인, 그래프이(가) 표시된 사진&#10;&#10;AI 생성 콘텐츠는 정확하지 않을 수 있습니다.">
+          <p:cNvPr id="6" name="그림 5" descr="Cap 2014-06-19 09-38-28-884.png">
             <a:extLst>
               <a:ext uri="{FF2B5EF4-FFF2-40B4-BE49-F238E27FC236}">
-                <a16:creationId xmlns:a16="http://schemas.microsoft.com/office/drawing/2014/main" id="{DC1ADCC9-38A7-999E-930A-BA7045CDD63C}"/>
+                <a16:creationId xmlns:a16="http://schemas.microsoft.com/office/drawing/2014/main" id="{300619DD-DECC-9FD9-694B-FA4EA7E9AC15}"/>
               </a:ext>
             </a:extLst>
           </p:cNvPr>
@@ -7466,22 +7466,97 @@
           </p:cNvPicPr>
           <p:nvPr/>
         </p:nvPicPr>
-        <p:blipFill>
-          <a:blip r:embed="rId2"/>
+        <p:blipFill rotWithShape="1">
+          <a:blip r:embed="rId2">
+            <a:extLst>
+              <a:ext uri="{28A0092B-C50C-407E-A947-70E740481C1C}">
+                <a14:useLocalDpi xmlns:a14="http://schemas.microsoft.com/office/drawing/2010/main" val="0"/>
+              </a:ext>
+            </a:extLst>
+          </a:blip>
+          <a:srcRect l="1728" t="13483" r="1915" b="2639"/>
           <a:stretch>
             <a:fillRect/>
           </a:stretch>
         </p:blipFill>
-        <p:spPr>
+        <p:spPr bwMode="auto">
           <a:xfrm>
-            <a:off x="221014" y="2923564"/>
-            <a:ext cx="11743601" cy="3343011"/>
+            <a:off x="2424417" y="3028426"/>
+            <a:ext cx="6765721" cy="2684477"/>
           </a:xfrm>
           <a:prstGeom prst="rect">
             <a:avLst/>
           </a:prstGeom>
+          <a:noFill/>
+          <a:ln>
+            <a:noFill/>
+          </a:ln>
+          <a:extLst>
+            <a:ext uri="{909E8E84-426E-40DD-AFC4-6F175D3DCCD1}">
+              <a14:hiddenFill xmlns:a14="http://schemas.microsoft.com/office/drawing/2010/main">
+                <a:solidFill>
+                  <a:srgbClr val="FFFFFF"/>
+                </a:solidFill>
+              </a14:hiddenFill>
+            </a:ext>
+            <a:ext uri="{91240B29-F687-4F45-9708-019B960494DF}">
+              <a14:hiddenLine xmlns:a14="http://schemas.microsoft.com/office/drawing/2010/main" w="9525">
+                <a:solidFill>
+                  <a:srgbClr val="000000"/>
+                </a:solidFill>
+                <a:miter lim="800000"/>
+                <a:headEnd/>
+                <a:tailEnd/>
+              </a14:hiddenLine>
+            </a:ext>
+          </a:extLst>
         </p:spPr>
       </p:pic>
+      <p:sp>
+        <p:nvSpPr>
+          <p:cNvPr id="9" name="TextBox 8">
+            <a:extLst>
+              <a:ext uri="{FF2B5EF4-FFF2-40B4-BE49-F238E27FC236}">
+                <a16:creationId xmlns:a16="http://schemas.microsoft.com/office/drawing/2014/main" id="{458D2FAA-E18B-89D9-E7C5-8713152754DE}"/>
+              </a:ext>
+            </a:extLst>
+          </p:cNvPr>
+          <p:cNvSpPr txBox="1"/>
+          <p:nvPr/>
+        </p:nvSpPr>
+        <p:spPr>
+          <a:xfrm>
+            <a:off x="4415464" y="2413307"/>
+            <a:ext cx="2731956" cy="276999"/>
+          </a:xfrm>
+          <a:prstGeom prst="rect">
+            <a:avLst/>
+          </a:prstGeom>
+          <a:noFill/>
+        </p:spPr>
+        <p:txBody>
+          <a:bodyPr wrap="square">
+            <a:spAutoFit/>
+          </a:bodyPr>
+          <a:lstStyle/>
+          <a:p>
+            <a:pPr algn="ctr"/>
+            <a:r>
+              <a:rPr lang="en-US" altLang="ko-KR" sz="1200" spc="-50"/>
+              <a:t>&lt;</a:t>
+            </a:r>
+            <a:r>
+              <a:rPr lang="ko-KR" altLang="en-US" sz="1200" spc="-50" dirty="0"/>
+              <a:t>지역이나 산업 전체의 한계저감비용</a:t>
+            </a:r>
+            <a:r>
+              <a:rPr lang="en-US" altLang="ko-KR" sz="1200" spc="-50" dirty="0"/>
+              <a:t>&gt;</a:t>
+            </a:r>
+            <a:endParaRPr lang="ko-KR" altLang="en-US" sz="1400" dirty="0"/>
+          </a:p>
+        </p:txBody>
+      </p:sp>
     </p:spTree>
     <p:extLst>
       <p:ext uri="{BB962C8B-B14F-4D97-AF65-F5344CB8AC3E}">
@@ -9417,36 +9492,6 @@
           </a:p>
         </p:txBody>
       </p:sp>
-      <p:pic>
-        <p:nvPicPr>
-          <p:cNvPr id="9" name="그림 8" descr="도표, 라인, 텍스트, 그래프이(가) 표시된 사진&#10;&#10;AI 생성 콘텐츠는 정확하지 않을 수 있습니다.">
-            <a:extLst>
-              <a:ext uri="{FF2B5EF4-FFF2-40B4-BE49-F238E27FC236}">
-                <a16:creationId xmlns:a16="http://schemas.microsoft.com/office/drawing/2014/main" id="{15E0DE48-5378-FC4E-66C7-D2619FDFA86A}"/>
-              </a:ext>
-            </a:extLst>
-          </p:cNvPr>
-          <p:cNvPicPr>
-            <a:picLocks noChangeAspect="1"/>
-          </p:cNvPicPr>
-          <p:nvPr/>
-        </p:nvPicPr>
-        <p:blipFill>
-          <a:blip r:embed="rId2"/>
-          <a:stretch>
-            <a:fillRect/>
-          </a:stretch>
-        </p:blipFill>
-        <p:spPr>
-          <a:xfrm>
-            <a:off x="7967284" y="2936907"/>
-            <a:ext cx="3144731" cy="3600000"/>
-          </a:xfrm>
-          <a:prstGeom prst="rect">
-            <a:avLst/>
-          </a:prstGeom>
-        </p:spPr>
-      </p:pic>
       <p:sp>
         <p:nvSpPr>
           <p:cNvPr id="12" name="TextBox 11">
@@ -9588,6 +9633,111 @@
               <a:rPr lang="en-US" altLang="ko-KR" sz="1600" spc="-50" dirty="0"/>
               <a:t>.</a:t>
             </a:r>
+          </a:p>
+        </p:txBody>
+      </p:sp>
+      <p:pic>
+        <p:nvPicPr>
+          <p:cNvPr id="5" name="그림 7" descr="Cap 2014-06-19 09-38-54-334.png">
+            <a:extLst>
+              <a:ext uri="{FF2B5EF4-FFF2-40B4-BE49-F238E27FC236}">
+                <a16:creationId xmlns:a16="http://schemas.microsoft.com/office/drawing/2014/main" id="{BEB4EBA8-249E-4DE3-10BD-262D86CA76A4}"/>
+              </a:ext>
+            </a:extLst>
+          </p:cNvPr>
+          <p:cNvPicPr>
+            <a:picLocks noChangeAspect="1"/>
+          </p:cNvPicPr>
+          <p:nvPr/>
+        </p:nvPicPr>
+        <p:blipFill rotWithShape="1">
+          <a:blip r:embed="rId2">
+            <a:extLst>
+              <a:ext uri="{28A0092B-C50C-407E-A947-70E740481C1C}">
+                <a14:useLocalDpi xmlns:a14="http://schemas.microsoft.com/office/drawing/2010/main" val="0"/>
+              </a:ext>
+            </a:extLst>
+          </a:blip>
+          <a:srcRect l="6045" t="19463" r="50501"/>
+          <a:stretch>
+            <a:fillRect/>
+          </a:stretch>
+        </p:blipFill>
+        <p:spPr bwMode="auto">
+          <a:xfrm>
+            <a:off x="8531604" y="3473042"/>
+            <a:ext cx="2550254" cy="2372948"/>
+          </a:xfrm>
+          <a:prstGeom prst="rect">
+            <a:avLst/>
+          </a:prstGeom>
+          <a:noFill/>
+          <a:ln>
+            <a:noFill/>
+          </a:ln>
+          <a:extLst>
+            <a:ext uri="{909E8E84-426E-40DD-AFC4-6F175D3DCCD1}">
+              <a14:hiddenFill xmlns:a14="http://schemas.microsoft.com/office/drawing/2010/main">
+                <a:solidFill>
+                  <a:srgbClr val="FFFFFF"/>
+                </a:solidFill>
+              </a14:hiddenFill>
+            </a:ext>
+            <a:ext uri="{91240B29-F687-4F45-9708-019B960494DF}">
+              <a14:hiddenLine xmlns:a14="http://schemas.microsoft.com/office/drawing/2010/main" w="9525">
+                <a:solidFill>
+                  <a:srgbClr val="000000"/>
+                </a:solidFill>
+                <a:miter lim="800000"/>
+                <a:headEnd/>
+                <a:tailEnd/>
+              </a14:hiddenLine>
+            </a:ext>
+          </a:extLst>
+        </p:spPr>
+      </p:pic>
+      <p:sp>
+        <p:nvSpPr>
+          <p:cNvPr id="7" name="TextBox 6">
+            <a:extLst>
+              <a:ext uri="{FF2B5EF4-FFF2-40B4-BE49-F238E27FC236}">
+                <a16:creationId xmlns:a16="http://schemas.microsoft.com/office/drawing/2014/main" id="{51A80B09-F268-A6FD-7BC9-1C54CCBEB68E}"/>
+              </a:ext>
+            </a:extLst>
+          </p:cNvPr>
+          <p:cNvSpPr txBox="1"/>
+          <p:nvPr/>
+        </p:nvSpPr>
+        <p:spPr>
+          <a:xfrm>
+            <a:off x="9141146" y="3107959"/>
+            <a:ext cx="1512872" cy="276999"/>
+          </a:xfrm>
+          <a:prstGeom prst="rect">
+            <a:avLst/>
+          </a:prstGeom>
+          <a:noFill/>
+        </p:spPr>
+        <p:txBody>
+          <a:bodyPr wrap="square">
+            <a:spAutoFit/>
+          </a:bodyPr>
+          <a:lstStyle/>
+          <a:p>
+            <a:pPr algn="ctr"/>
+            <a:r>
+              <a:rPr lang="en-US" altLang="ko-KR" sz="1200" spc="-50" dirty="0"/>
+              <a:t>&lt;</a:t>
+            </a:r>
+            <a:r>
+              <a:rPr lang="ko-KR" altLang="en-US" sz="1200" spc="-50" dirty="0"/>
+              <a:t>최적 배출량</a:t>
+            </a:r>
+            <a:r>
+              <a:rPr lang="en-US" altLang="ko-KR" sz="1200" spc="-50" dirty="0"/>
+              <a:t>&gt;</a:t>
+            </a:r>
+            <a:endParaRPr lang="ko-KR" altLang="en-US" sz="1400" dirty="0"/>
           </a:p>
         </p:txBody>
       </p:sp>
@@ -9921,36 +10071,6 @@
       </p:sp>
       <p:pic>
         <p:nvPicPr>
-          <p:cNvPr id="5" name="그림 4" descr="텍스트, 도표, 라인, 그래프이(가) 표시된 사진&#10;&#10;AI 생성 콘텐츠는 정확하지 않을 수 있습니다.">
-            <a:extLst>
-              <a:ext uri="{FF2B5EF4-FFF2-40B4-BE49-F238E27FC236}">
-                <a16:creationId xmlns:a16="http://schemas.microsoft.com/office/drawing/2014/main" id="{0F5C90A6-60DF-8F8C-8975-B880D50EC2CF}"/>
-              </a:ext>
-            </a:extLst>
-          </p:cNvPr>
-          <p:cNvPicPr>
-            <a:picLocks noChangeAspect="1"/>
-          </p:cNvPicPr>
-          <p:nvPr/>
-        </p:nvPicPr>
-        <p:blipFill>
-          <a:blip r:embed="rId2"/>
-          <a:stretch>
-            <a:fillRect/>
-          </a:stretch>
-        </p:blipFill>
-        <p:spPr>
-          <a:xfrm>
-            <a:off x="8488680" y="787394"/>
-            <a:ext cx="2923325" cy="3346541"/>
-          </a:xfrm>
-          <a:prstGeom prst="rect">
-            <a:avLst/>
-          </a:prstGeom>
-        </p:spPr>
-      </p:pic>
-      <p:pic>
-        <p:nvPicPr>
           <p:cNvPr id="7" name="그림 6" descr="도표, 라인, 텍스트, 그래프이(가) 표시된 사진&#10;&#10;AI 생성 콘텐츠는 정확하지 않을 수 있습니다.">
             <a:extLst>
               <a:ext uri="{FF2B5EF4-FFF2-40B4-BE49-F238E27FC236}">
@@ -9964,7 +10084,7 @@
           <p:nvPr/>
         </p:nvPicPr>
         <p:blipFill>
-          <a:blip r:embed="rId3"/>
+          <a:blip r:embed="rId2"/>
           <a:stretch>
             <a:fillRect/>
           </a:stretch>
@@ -9994,7 +10114,7 @@
           <p:nvPr/>
         </p:nvPicPr>
         <p:blipFill>
-          <a:blip r:embed="rId2"/>
+          <a:blip r:embed="rId3"/>
           <a:stretch>
             <a:fillRect/>
           </a:stretch>
@@ -10009,6 +10129,115 @@
           </a:prstGeom>
         </p:spPr>
       </p:pic>
+      <p:pic>
+        <p:nvPicPr>
+          <p:cNvPr id="6" name="그림 7" descr="Cap 2014-06-19 09-38-54-334.png">
+            <a:extLst>
+              <a:ext uri="{FF2B5EF4-FFF2-40B4-BE49-F238E27FC236}">
+                <a16:creationId xmlns:a16="http://schemas.microsoft.com/office/drawing/2014/main" id="{9A7C9AD7-EF1F-BD7C-ACA5-6BB9D9F82AF1}"/>
+              </a:ext>
+            </a:extLst>
+          </p:cNvPr>
+          <p:cNvPicPr>
+            <a:picLocks noChangeAspect="1"/>
+          </p:cNvPicPr>
+          <p:nvPr/>
+        </p:nvPicPr>
+        <p:blipFill rotWithShape="1">
+          <a:blip r:embed="rId4">
+            <a:extLst>
+              <a:ext uri="{28A0092B-C50C-407E-A947-70E740481C1C}">
+                <a14:useLocalDpi xmlns:a14="http://schemas.microsoft.com/office/drawing/2010/main" val="0"/>
+              </a:ext>
+            </a:extLst>
+          </a:blip>
+          <a:srcRect l="50785" t="20886" r="6047" b="1954"/>
+          <a:stretch>
+            <a:fillRect/>
+          </a:stretch>
+        </p:blipFill>
+        <p:spPr bwMode="auto">
+          <a:xfrm>
+            <a:off x="8826616" y="1216404"/>
+            <a:ext cx="2533475" cy="2273416"/>
+          </a:xfrm>
+          <a:prstGeom prst="rect">
+            <a:avLst/>
+          </a:prstGeom>
+          <a:noFill/>
+          <a:ln>
+            <a:noFill/>
+          </a:ln>
+          <a:extLst>
+            <a:ext uri="{909E8E84-426E-40DD-AFC4-6F175D3DCCD1}">
+              <a14:hiddenFill xmlns:a14="http://schemas.microsoft.com/office/drawing/2010/main">
+                <a:solidFill>
+                  <a:srgbClr val="FFFFFF"/>
+                </a:solidFill>
+              </a14:hiddenFill>
+            </a:ext>
+            <a:ext uri="{91240B29-F687-4F45-9708-019B960494DF}">
+              <a14:hiddenLine xmlns:a14="http://schemas.microsoft.com/office/drawing/2010/main" w="9525">
+                <a:solidFill>
+                  <a:srgbClr val="000000"/>
+                </a:solidFill>
+                <a:miter lim="800000"/>
+                <a:headEnd/>
+                <a:tailEnd/>
+              </a14:hiddenLine>
+            </a:ext>
+          </a:extLst>
+        </p:spPr>
+      </p:pic>
+      <p:sp>
+        <p:nvSpPr>
+          <p:cNvPr id="10" name="TextBox 9">
+            <a:extLst>
+              <a:ext uri="{FF2B5EF4-FFF2-40B4-BE49-F238E27FC236}">
+                <a16:creationId xmlns:a16="http://schemas.microsoft.com/office/drawing/2014/main" id="{D47807CB-C3A1-18F2-F2D4-A3B9BA218C33}"/>
+              </a:ext>
+            </a:extLst>
+          </p:cNvPr>
+          <p:cNvSpPr txBox="1"/>
+          <p:nvPr/>
+        </p:nvSpPr>
+        <p:spPr>
+          <a:xfrm>
+            <a:off x="9388622" y="859709"/>
+            <a:ext cx="1512872" cy="276999"/>
+          </a:xfrm>
+          <a:prstGeom prst="rect">
+            <a:avLst/>
+          </a:prstGeom>
+          <a:noFill/>
+        </p:spPr>
+        <p:txBody>
+          <a:bodyPr wrap="square">
+            <a:spAutoFit/>
+          </a:bodyPr>
+          <a:lstStyle/>
+          <a:p>
+            <a:pPr algn="ctr"/>
+            <a:r>
+              <a:rPr lang="en-US" altLang="ko-KR" sz="1200" spc="-50" dirty="0"/>
+              <a:t>&lt;</a:t>
+            </a:r>
+            <a:r>
+              <a:rPr lang="ko-KR" altLang="en-US" sz="1200" spc="-50" dirty="0"/>
+              <a:t>최적 </a:t>
+            </a:r>
+            <a:r>
+              <a:rPr lang="ko-KR" altLang="en-US" sz="1200" spc="-50" dirty="0" err="1"/>
+              <a:t>저감량</a:t>
+            </a:r>
+            <a:r>
+              <a:rPr lang="en-US" altLang="ko-KR" sz="1200" spc="-50" dirty="0"/>
+              <a:t>&gt;</a:t>
+            </a:r>
+            <a:endParaRPr lang="ko-KR" altLang="en-US" sz="1400" dirty="0"/>
+          </a:p>
+        </p:txBody>
+      </p:sp>
     </p:spTree>
     <p:extLst>
       <p:ext uri="{BB962C8B-B14F-4D97-AF65-F5344CB8AC3E}">
@@ -12136,6 +12365,121 @@
           </a:prstGeom>
         </p:spPr>
       </p:pic>
+      <p:sp>
+        <p:nvSpPr>
+          <p:cNvPr id="5" name="TextBox 4">
+            <a:extLst>
+              <a:ext uri="{FF2B5EF4-FFF2-40B4-BE49-F238E27FC236}">
+                <a16:creationId xmlns:a16="http://schemas.microsoft.com/office/drawing/2014/main" id="{391A40AF-2D90-62AB-44CC-48B9C2885486}"/>
+              </a:ext>
+            </a:extLst>
+          </p:cNvPr>
+          <p:cNvSpPr txBox="1"/>
+          <p:nvPr/>
+        </p:nvSpPr>
+        <p:spPr>
+          <a:xfrm>
+            <a:off x="340803" y="5599003"/>
+            <a:ext cx="5523102" cy="646331"/>
+          </a:xfrm>
+          <a:prstGeom prst="rect">
+            <a:avLst/>
+          </a:prstGeom>
+          <a:noFill/>
+        </p:spPr>
+        <p:txBody>
+          <a:bodyPr wrap="square">
+            <a:spAutoFit/>
+          </a:bodyPr>
+          <a:lstStyle/>
+          <a:p>
+            <a:r>
+              <a:rPr lang="en-US" altLang="ko-KR" sz="1200" spc="-50" dirty="0"/>
+              <a:t>※</a:t>
+            </a:r>
+            <a:r>
+              <a:rPr lang="ko-KR" altLang="en-US" sz="1200" spc="-50" dirty="0"/>
+              <a:t> </a:t>
+            </a:r>
+            <a:r>
+              <a:rPr lang="en-US" altLang="ko-KR" sz="1200" spc="-50" dirty="0"/>
+              <a:t>ppm</a:t>
+            </a:r>
+            <a:r>
+              <a:rPr lang="ko-KR" altLang="en-US" sz="1200" spc="-50" dirty="0"/>
+              <a:t> </a:t>
+            </a:r>
+            <a:r>
+              <a:rPr lang="en-US" altLang="ko-KR" sz="1200" spc="-50" dirty="0"/>
+              <a:t>(parts</a:t>
+            </a:r>
+            <a:r>
+              <a:rPr lang="ko-KR" altLang="en-US" sz="1200" spc="-50" dirty="0"/>
+              <a:t> </a:t>
+            </a:r>
+            <a:r>
+              <a:rPr lang="en-US" altLang="ko-KR" sz="1200" spc="-50" dirty="0"/>
+              <a:t>per</a:t>
+            </a:r>
+            <a:r>
+              <a:rPr lang="ko-KR" altLang="en-US" sz="1200" spc="-50" dirty="0"/>
+              <a:t> </a:t>
+            </a:r>
+            <a:r>
+              <a:rPr lang="en-US" altLang="ko-KR" sz="1200" spc="-50" dirty="0"/>
+              <a:t>million):</a:t>
+            </a:r>
+            <a:r>
+              <a:rPr lang="ko-KR" altLang="en-US" sz="1200" spc="-50" dirty="0"/>
+              <a:t> 백만분의 일</a:t>
+            </a:r>
+            <a:endParaRPr lang="en-US" altLang="ko-KR" sz="1200" spc="-50" dirty="0"/>
+          </a:p>
+          <a:p>
+            <a:r>
+              <a:rPr lang="ko-KR" altLang="en-US" sz="1200" spc="-50" dirty="0"/>
+              <a:t>암모니아 농도가 </a:t>
+            </a:r>
+            <a:r>
+              <a:rPr lang="en-US" altLang="ko-KR" sz="1200" spc="-50" dirty="0"/>
+              <a:t>1ppm </a:t>
+            </a:r>
+            <a:r>
+              <a:rPr lang="ko-KR" altLang="en-US" sz="1200" spc="-50" dirty="0"/>
+              <a:t>이라고 하면</a:t>
+            </a:r>
+            <a:r>
+              <a:rPr lang="en-US" altLang="ko-KR" sz="1200" spc="-50" dirty="0"/>
+              <a:t>, </a:t>
+            </a:r>
+            <a:r>
+              <a:rPr lang="ko-KR" altLang="en-US" sz="1200" spc="-50" dirty="0"/>
+              <a:t>공기 분자 </a:t>
+            </a:r>
+            <a:r>
+              <a:rPr lang="en-US" altLang="ko-KR" sz="1200" spc="-50" dirty="0"/>
+              <a:t>100</a:t>
+            </a:r>
+            <a:r>
+              <a:rPr lang="ko-KR" altLang="en-US" sz="1200" spc="-50" dirty="0"/>
+              <a:t>만개 중에 암모니아 분자가 </a:t>
+            </a:r>
+            <a:r>
+              <a:rPr lang="en-US" altLang="ko-KR" sz="1200" spc="-50" dirty="0"/>
+              <a:t>1</a:t>
+            </a:r>
+            <a:r>
+              <a:rPr lang="ko-KR" altLang="en-US" sz="1200" spc="-50" dirty="0"/>
+              <a:t>개인 상태를 의미한다</a:t>
+            </a:r>
+            <a:r>
+              <a:rPr lang="en-US" altLang="ko-KR" sz="1200" spc="-50" dirty="0"/>
+              <a:t>.</a:t>
+            </a:r>
+            <a:endParaRPr lang="ko-KR" altLang="en-US" sz="1400" dirty="0"/>
+          </a:p>
+        </p:txBody>
+      </p:sp>
     </p:spTree>
     <p:extLst>
       <p:ext uri="{BB962C8B-B14F-4D97-AF65-F5344CB8AC3E}">
@@ -13682,7 +14026,7 @@
         <p:spPr>
           <a:xfrm>
             <a:off x="678872" y="958844"/>
-            <a:ext cx="11027965" cy="4476675"/>
+            <a:ext cx="11027965" cy="4338175"/>
           </a:xfrm>
           <a:prstGeom prst="rect">
             <a:avLst/>
@@ -13793,8 +14137,76 @@
               </a:lnSpc>
             </a:pPr>
             <a:r>
-              <a:rPr lang="en-US" altLang="ko-KR" sz="1000" spc="-50" dirty="0"/>
-              <a:t>https://www.hani.co.kr/arti/society/society_general/1146946.html?utm_source=chatgpt.com</a:t>
+              <a:rPr lang="en-US" altLang="ko-KR" sz="1000" spc="-50" dirty="0">
+                <a:hlinkClick r:id="rId2"/>
+              </a:rPr>
+              <a:t>https://www.hani.co.kr/arti/society/society_general/1146946.html</a:t>
+            </a:r>
+            <a:endParaRPr lang="en-US" altLang="ko-KR" sz="1000" spc="-50" dirty="0"/>
+          </a:p>
+          <a:p>
+            <a:pPr marL="549275" lvl="1">
+              <a:lnSpc>
+                <a:spcPct val="150000"/>
+              </a:lnSpc>
+            </a:pPr>
+            <a:endParaRPr lang="en-US" altLang="ko-KR" sz="1600" spc="-50" dirty="0"/>
+          </a:p>
+          <a:p>
+            <a:pPr marL="377825" indent="-285750">
+              <a:lnSpc>
+                <a:spcPct val="150000"/>
+              </a:lnSpc>
+              <a:buFont typeface="Arial" panose="020B0604020202020204" pitchFamily="34" charset="0"/>
+              <a:buChar char="•"/>
+            </a:pPr>
+            <a:r>
+              <a:rPr lang="ko-KR" altLang="en-US" sz="1600" spc="-50" dirty="0"/>
+              <a:t>낙동강 페놀 오염 사건 </a:t>
+            </a:r>
+            <a:r>
+              <a:rPr lang="en-US" altLang="ko-KR" sz="1600" spc="-50" dirty="0"/>
+              <a:t>(</a:t>
+            </a:r>
+            <a:r>
+              <a:rPr lang="ko-KR" altLang="en-US" sz="1600" spc="-50" dirty="0"/>
+              <a:t>행정안전부 국가기록원 </a:t>
+            </a:r>
+            <a:r>
+              <a:rPr lang="en-US" altLang="ko-KR" sz="1600" spc="-50" dirty="0"/>
+              <a:t>&gt; </a:t>
+            </a:r>
+            <a:r>
+              <a:rPr lang="ko-KR" altLang="en-US" sz="1600" spc="-50" dirty="0"/>
+              <a:t>재난방재 </a:t>
+            </a:r>
+            <a:r>
+              <a:rPr lang="en-US" altLang="ko-KR" sz="1600" spc="-50" dirty="0"/>
+              <a:t>&gt; </a:t>
+            </a:r>
+            <a:r>
+              <a:rPr lang="ko-KR" altLang="en-US" sz="1600" spc="-50" dirty="0"/>
+              <a:t>사회재난 </a:t>
+            </a:r>
+            <a:r>
+              <a:rPr lang="en-US" altLang="ko-KR" sz="1600" spc="-50" dirty="0"/>
+              <a:t>&gt; </a:t>
+            </a:r>
+            <a:r>
+              <a:rPr lang="ko-KR" altLang="en-US" sz="1600" spc="-50" dirty="0"/>
+              <a:t>환경오염</a:t>
+            </a:r>
+            <a:r>
+              <a:rPr lang="en-US" altLang="ko-KR" sz="1600" spc="-50" dirty="0"/>
+              <a:t> &gt; </a:t>
+            </a:r>
+            <a:r>
+              <a:rPr lang="ko-KR" altLang="en-US" sz="1600" spc="-50" dirty="0"/>
+              <a:t>낙동강 페놀유출사건 참고</a:t>
+            </a:r>
+            <a:r>
+              <a:rPr lang="en-US" altLang="ko-KR" sz="1600" spc="-50" dirty="0"/>
+              <a:t>)</a:t>
             </a:r>
           </a:p>
           <a:p>
@@ -13805,64 +14217,47 @@
               <a:buFont typeface="Wingdings" panose="05000000000000000000" pitchFamily="2" charset="2"/>
               <a:buChar char="ü"/>
             </a:pPr>
+            <a:r>
+              <a:rPr lang="en-US" altLang="ko-KR" sz="1600" spc="-50" dirty="0"/>
+              <a:t>1</a:t>
+            </a:r>
+            <a:r>
+              <a:rPr lang="ko-KR" altLang="en-US" sz="1600" spc="-50" dirty="0"/>
+              <a:t>차 페놀오염은 </a:t>
+            </a:r>
+            <a:r>
+              <a:rPr lang="en-US" altLang="ko-KR" sz="1600" spc="-50" dirty="0"/>
+              <a:t>1991</a:t>
+            </a:r>
+            <a:r>
+              <a:rPr lang="ko-KR" altLang="en-US" sz="1600" spc="-50" dirty="0"/>
+              <a:t>년 </a:t>
+            </a:r>
+            <a:r>
+              <a:rPr lang="en-US" altLang="ko-KR" sz="1600" spc="-50" dirty="0"/>
+              <a:t>3</a:t>
+            </a:r>
+            <a:r>
+              <a:rPr lang="ko-KR" altLang="en-US" sz="1600" spc="-50" dirty="0"/>
+              <a:t>월 </a:t>
+            </a:r>
+            <a:r>
+              <a:rPr lang="en-US" altLang="ko-KR" sz="1600" spc="-50" dirty="0"/>
+              <a:t>16</a:t>
+            </a:r>
+            <a:r>
+              <a:rPr lang="ko-KR" altLang="en-US" sz="1600" spc="-50" dirty="0"/>
+              <a:t>일 두산전자 구미공장에서 페놀원액 </a:t>
+            </a:r>
+            <a:r>
+              <a:rPr lang="en-US" altLang="ko-KR" sz="1600" spc="-50" dirty="0"/>
+              <a:t>30</a:t>
+            </a:r>
+            <a:r>
+              <a:rPr lang="ko-KR" altLang="en-US" sz="1600" spc="-50" dirty="0"/>
+              <a:t>톤이 파손된 파이프를 통해 낙동강으로 유입된 사건</a:t>
+            </a:r>
             <a:endParaRPr lang="en-US" altLang="ko-KR" sz="1600" spc="-50" dirty="0"/>
-          </a:p>
-          <a:p>
-            <a:pPr marL="377825" indent="-285750">
-              <a:lnSpc>
-                <a:spcPct val="150000"/>
-              </a:lnSpc>
-              <a:buFont typeface="Arial" panose="020B0604020202020204" pitchFamily="34" charset="0"/>
-              <a:buChar char="•"/>
-            </a:pPr>
-            <a:r>
-              <a:rPr lang="ko-KR" altLang="en-US" sz="1600" spc="-50" dirty="0"/>
-              <a:t>낙동강 페놀 오염 사건 </a:t>
-            </a:r>
-            <a:r>
-              <a:rPr lang="en-US" altLang="ko-KR" sz="1600" spc="-50" dirty="0"/>
-              <a:t>(</a:t>
-            </a:r>
-            <a:r>
-              <a:rPr lang="ko-KR" altLang="en-US" sz="1600" spc="-50" dirty="0"/>
-              <a:t>행정안전부 국가기록원 </a:t>
-            </a:r>
-            <a:r>
-              <a:rPr lang="en-US" altLang="ko-KR" sz="1600" spc="-50" dirty="0"/>
-              <a:t>&gt; </a:t>
-            </a:r>
-            <a:r>
-              <a:rPr lang="ko-KR" altLang="en-US" sz="1600" spc="-50" dirty="0"/>
-              <a:t>재난방재 </a:t>
-            </a:r>
-            <a:r>
-              <a:rPr lang="en-US" altLang="ko-KR" sz="1600" spc="-50" dirty="0"/>
-              <a:t>&gt; </a:t>
-            </a:r>
-            <a:r>
-              <a:rPr lang="ko-KR" altLang="en-US" sz="1600" spc="-50" dirty="0"/>
-              <a:t>사회재난 </a:t>
-            </a:r>
-            <a:r>
-              <a:rPr lang="en-US" altLang="ko-KR" sz="1600" spc="-50" dirty="0"/>
-              <a:t>&gt; </a:t>
-            </a:r>
-            <a:r>
-              <a:rPr lang="ko-KR" altLang="en-US" sz="1600" spc="-50" dirty="0"/>
-              <a:t>환경오염</a:t>
-            </a:r>
-            <a:r>
-              <a:rPr lang="en-US" altLang="ko-KR" sz="1600" spc="-50" dirty="0"/>
-              <a:t> &gt; </a:t>
-            </a:r>
-            <a:r>
-              <a:rPr lang="ko-KR" altLang="en-US" sz="1600" spc="-50" dirty="0"/>
-              <a:t>낙동강 페놀유출사건 참고</a:t>
-            </a:r>
-            <a:r>
-              <a:rPr lang="en-US" altLang="ko-KR" sz="1600" spc="-50" dirty="0"/>
-              <a:t>)</a:t>
-            </a:r>
           </a:p>
           <a:p>
             <a:pPr marL="835025" lvl="1" indent="-285750">
@@ -13874,7 +14269,7 @@
             </a:pPr>
             <a:r>
               <a:rPr lang="en-US" altLang="ko-KR" sz="1600" spc="-50" dirty="0"/>
-              <a:t>1</a:t>
+              <a:t>2</a:t>
             </a:r>
             <a:r>
               <a:rPr lang="ko-KR" altLang="en-US" sz="1600" spc="-50" dirty="0"/>
@@ -13882,15 +14277,7 @@
             </a:r>
             <a:r>
               <a:rPr lang="en-US" altLang="ko-KR" sz="1600" spc="-50" dirty="0"/>
-              <a:t>1991</a:t>
-            </a:r>
-            <a:r>
-              <a:rPr lang="ko-KR" altLang="en-US" sz="1600" spc="-50" dirty="0"/>
-              <a:t>년 </a:t>
-            </a:r>
-            <a:r>
-              <a:rPr lang="en-US" altLang="ko-KR" sz="1600" spc="-50" dirty="0"/>
-              <a:t>3</a:t>
+              <a:t>4</a:t>
             </a:r>
             <a:r>
               <a:rPr lang="ko-KR" altLang="en-US" sz="1600" spc="-50" dirty="0"/>
@@ -13898,19 +14285,19 @@
             </a:r>
             <a:r>
               <a:rPr lang="en-US" altLang="ko-KR" sz="1600" spc="-50" dirty="0"/>
-              <a:t>16</a:t>
+              <a:t>22</a:t>
             </a:r>
             <a:r>
               <a:rPr lang="ko-KR" altLang="en-US" sz="1600" spc="-50" dirty="0"/>
-              <a:t>일 두산전자 구미공장에서 페놀원액 </a:t>
+              <a:t>일 부실 보수공사로 인해 페놀탱크 파이프 이음새 부분이 파열되어 페놀원액 약 </a:t>
             </a:r>
             <a:r>
               <a:rPr lang="en-US" altLang="ko-KR" sz="1600" spc="-50" dirty="0"/>
-              <a:t>30</a:t>
+              <a:t>1.3</a:t>
             </a:r>
             <a:r>
               <a:rPr lang="ko-KR" altLang="en-US" sz="1600" spc="-50" dirty="0"/>
-              <a:t>톤이 파손된 파이프를 통해 낙동강으로 유입된 사건</a:t>
+              <a:t>톤이 낙동강으로 유입되면서 대구지역에 식수공급이 중단</a:t>
             </a:r>
             <a:endParaRPr lang="en-US" altLang="ko-KR" sz="1600" spc="-50" dirty="0"/>
           </a:p>
@@ -13923,52 +14310,45 @@
               <a:buChar char="ü"/>
             </a:pPr>
             <a:r>
-              <a:rPr lang="en-US" altLang="ko-KR" sz="1600" spc="-50" dirty="0"/>
-              <a:t>2</a:t>
-            </a:r>
-            <a:r>
-              <a:rPr lang="ko-KR" altLang="en-US" sz="1600" spc="-50" dirty="0"/>
-              <a:t>차 페놀오염은 </a:t>
-            </a:r>
-            <a:r>
-              <a:rPr lang="en-US" altLang="ko-KR" sz="1600" spc="-50" dirty="0"/>
-              <a:t>4</a:t>
-            </a:r>
-            <a:r>
-              <a:rPr lang="ko-KR" altLang="en-US" sz="1600" spc="-50" dirty="0"/>
-              <a:t>월 </a:t>
-            </a:r>
-            <a:r>
-              <a:rPr lang="en-US" altLang="ko-KR" sz="1600" spc="-50" dirty="0"/>
-              <a:t>22</a:t>
-            </a:r>
-            <a:r>
-              <a:rPr lang="ko-KR" altLang="en-US" sz="1600" spc="-50" dirty="0"/>
-              <a:t>일 부실 보수공사로 인해 페놀탱크 파이프 이음새 부분이 파열되어 페놀원액 약 </a:t>
-            </a:r>
-            <a:r>
-              <a:rPr lang="en-US" altLang="ko-KR" sz="1600" spc="-50" dirty="0"/>
-              <a:t>1.3</a:t>
-            </a:r>
-            <a:r>
-              <a:rPr lang="ko-KR" altLang="en-US" sz="1600" spc="-50" dirty="0"/>
-              <a:t>톤이 낙동강으로 유입되면서 대구지역에 식수공급이 중단</a:t>
-            </a:r>
-            <a:endParaRPr lang="en-US" altLang="ko-KR" sz="1600" spc="-50" dirty="0"/>
-          </a:p>
-          <a:p>
-            <a:pPr marL="835025" lvl="1" indent="-285750">
-              <a:lnSpc>
-                <a:spcPct val="150000"/>
-              </a:lnSpc>
-              <a:buFont typeface="Wingdings" panose="05000000000000000000" pitchFamily="2" charset="2"/>
-              <a:buChar char="ü"/>
-            </a:pPr>
-            <a:r>
               <a:rPr lang="ko-KR" altLang="en-US" sz="1600" spc="-50" dirty="0"/>
               <a:t>공무원 및 두산전자 관계자들 징계처분</a:t>
             </a:r>
             <a:endParaRPr lang="en-US" altLang="ko-KR" sz="1600" spc="-50" dirty="0"/>
+          </a:p>
+        </p:txBody>
+      </p:sp>
+      <p:sp>
+        <p:nvSpPr>
+          <p:cNvPr id="5" name="TextBox 4">
+            <a:extLst>
+              <a:ext uri="{FF2B5EF4-FFF2-40B4-BE49-F238E27FC236}">
+                <a16:creationId xmlns:a16="http://schemas.microsoft.com/office/drawing/2014/main" id="{74173A98-23EE-95D4-2977-D4C3093B13E3}"/>
+              </a:ext>
+            </a:extLst>
+          </p:cNvPr>
+          <p:cNvSpPr txBox="1"/>
+          <p:nvPr/>
+        </p:nvSpPr>
+        <p:spPr>
+          <a:xfrm>
+            <a:off x="1204869" y="5297019"/>
+            <a:ext cx="6134448" cy="246221"/>
+          </a:xfrm>
+          <a:prstGeom prst="rect">
+            <a:avLst/>
+          </a:prstGeom>
+          <a:noFill/>
+        </p:spPr>
+        <p:txBody>
+          <a:bodyPr wrap="square">
+            <a:spAutoFit/>
+          </a:bodyPr>
+          <a:lstStyle/>
+          <a:p>
+            <a:r>
+              <a:rPr lang="ko-KR" altLang="en-US" sz="1000" dirty="0"/>
+              <a:t>https://www.archives.go.kr/next/newsearch/listSubjectDescription.do?id=006961&amp;sitePage</a:t>
+            </a:r>
           </a:p>
         </p:txBody>
       </p:sp>
@@ -26052,9 +26432,28 @@
             </a:r>
             <a:r>
               <a:rPr lang="ko-KR" altLang="en-US" sz="1600" spc="-50" dirty="0"/>
-              <a:t>오염피해가 일정수준에 도달하면 급속히 증가하는 형태로 바뀜</a:t>
-            </a:r>
-            <a:endParaRPr lang="en-US" altLang="ko-KR" sz="1600" spc="-50" dirty="0"/>
+              <a:t>오염피해가 일정수준에 도달하면 급속히 증가하는 형태로 바뀐다</a:t>
+            </a:r>
+            <a:r>
+              <a:rPr lang="en-US" altLang="ko-KR" sz="1600" spc="-50" dirty="0"/>
+              <a:t>. (</a:t>
+            </a:r>
+            <a:r>
+              <a:rPr lang="ko-KR" altLang="en-US" sz="1600" spc="-50" dirty="0"/>
+              <a:t>예</a:t>
+            </a:r>
+            <a:r>
+              <a:rPr lang="en-US" altLang="ko-KR" sz="1600" spc="-50" dirty="0"/>
+              <a:t>: </a:t>
+            </a:r>
+            <a:r>
+              <a:rPr lang="ko-KR" altLang="en-US" sz="1600" spc="-50" dirty="0"/>
+              <a:t>생활하수</a:t>
+            </a:r>
+            <a:r>
+              <a:rPr lang="en-US" altLang="ko-KR" sz="1600" spc="-50" dirty="0"/>
+              <a:t>)</a:t>
+            </a:r>
           </a:p>
           <a:p>
             <a:pPr marL="835025" lvl="1" indent="-285750">
@@ -26086,9 +26485,28 @@
             </a:r>
             <a:r>
               <a:rPr lang="ko-KR" altLang="en-US" sz="1600" spc="-50" dirty="0"/>
-              <a:t>인 수준에서도 한계피해는 양의 값을 가질 수 있음</a:t>
-            </a:r>
-            <a:endParaRPr lang="en-US" altLang="ko-KR" sz="1600" spc="-50" dirty="0"/>
+              <a:t>인 수준에서도 한계피해는 양의 값을 가질 수 있다</a:t>
+            </a:r>
+            <a:r>
+              <a:rPr lang="en-US" altLang="ko-KR" sz="1600" spc="-50" dirty="0"/>
+              <a:t>. (</a:t>
+            </a:r>
+            <a:r>
+              <a:rPr lang="ko-KR" altLang="en-US" sz="1600" spc="-50" dirty="0"/>
+              <a:t>예</a:t>
+            </a:r>
+            <a:r>
+              <a:rPr lang="en-US" altLang="ko-KR" sz="1600" spc="-50" dirty="0"/>
+              <a:t>: </a:t>
+            </a:r>
+            <a:r>
+              <a:rPr lang="ko-KR" altLang="en-US" sz="1600" spc="-50" dirty="0"/>
+              <a:t>수은</a:t>
+            </a:r>
+            <a:r>
+              <a:rPr lang="en-US" altLang="ko-KR" sz="1600" spc="-50" dirty="0"/>
+              <a:t>)</a:t>
+            </a:r>
           </a:p>
           <a:p>
             <a:pPr marL="835025" lvl="1" indent="-285750">
@@ -26104,10 +26522,10 @@
       </p:sp>
       <p:pic>
         <p:nvPicPr>
-          <p:cNvPr id="5" name="그림 4" descr="텍스트, 도표, 라인, 그래프이(가) 표시된 사진&#10;&#10;AI 생성 콘텐츠는 정확하지 않을 수 있습니다.">
+          <p:cNvPr id="6" name="그림 8" descr="Cap 2014-06-19 09-36-21-644.png">
             <a:extLst>
               <a:ext uri="{FF2B5EF4-FFF2-40B4-BE49-F238E27FC236}">
-                <a16:creationId xmlns:a16="http://schemas.microsoft.com/office/drawing/2014/main" id="{7BAF8C71-E34D-E549-2D0B-E0EE13ABD9C0}"/>
+                <a16:creationId xmlns:a16="http://schemas.microsoft.com/office/drawing/2014/main" id="{22FFA476-B586-04E2-4590-4046BB0CA160}"/>
               </a:ext>
             </a:extLst>
           </p:cNvPr>
@@ -26116,22 +26534,105 @@
           </p:cNvPicPr>
           <p:nvPr/>
         </p:nvPicPr>
-        <p:blipFill>
-          <a:blip r:embed="rId2"/>
+        <p:blipFill rotWithShape="1">
+          <a:blip r:embed="rId2">
+            <a:extLst>
+              <a:ext uri="{28A0092B-C50C-407E-A947-70E740481C1C}">
+                <a14:useLocalDpi xmlns:a14="http://schemas.microsoft.com/office/drawing/2010/main" val="0"/>
+              </a:ext>
+            </a:extLst>
+          </a:blip>
+          <a:srcRect l="5430" t="14844" r="5814" b="3562"/>
           <a:stretch>
             <a:fillRect/>
           </a:stretch>
         </p:blipFill>
-        <p:spPr>
+        <p:spPr bwMode="auto">
           <a:xfrm>
-            <a:off x="4922065" y="4102101"/>
-            <a:ext cx="5877752" cy="2509800"/>
+            <a:off x="4924339" y="4528151"/>
+            <a:ext cx="4597166" cy="2046502"/>
           </a:xfrm>
           <a:prstGeom prst="rect">
             <a:avLst/>
           </a:prstGeom>
+          <a:noFill/>
+          <a:ln>
+            <a:noFill/>
+          </a:ln>
+          <a:extLst>
+            <a:ext uri="{909E8E84-426E-40DD-AFC4-6F175D3DCCD1}">
+              <a14:hiddenFill xmlns:a14="http://schemas.microsoft.com/office/drawing/2010/main">
+                <a:solidFill>
+                  <a:srgbClr val="FFFFFF"/>
+                </a:solidFill>
+              </a14:hiddenFill>
+            </a:ext>
+            <a:ext uri="{91240B29-F687-4F45-9708-019B960494DF}">
+              <a14:hiddenLine xmlns:a14="http://schemas.microsoft.com/office/drawing/2010/main" w="9525">
+                <a:solidFill>
+                  <a:srgbClr val="000000"/>
+                </a:solidFill>
+                <a:miter lim="800000"/>
+                <a:headEnd/>
+                <a:tailEnd/>
+              </a14:hiddenLine>
+            </a:ext>
+          </a:extLst>
         </p:spPr>
       </p:pic>
+      <p:sp>
+        <p:nvSpPr>
+          <p:cNvPr id="9" name="TextBox 8">
+            <a:extLst>
+              <a:ext uri="{FF2B5EF4-FFF2-40B4-BE49-F238E27FC236}">
+                <a16:creationId xmlns:a16="http://schemas.microsoft.com/office/drawing/2014/main" id="{0A425602-232E-7E16-27AE-4C8213551EDF}"/>
+              </a:ext>
+            </a:extLst>
+          </p:cNvPr>
+          <p:cNvSpPr txBox="1"/>
+          <p:nvPr/>
+        </p:nvSpPr>
+        <p:spPr>
+          <a:xfrm>
+            <a:off x="5933872" y="4213041"/>
+            <a:ext cx="2578100" cy="276999"/>
+          </a:xfrm>
+          <a:prstGeom prst="rect">
+            <a:avLst/>
+          </a:prstGeom>
+          <a:noFill/>
+        </p:spPr>
+        <p:txBody>
+          <a:bodyPr wrap="square">
+            <a:spAutoFit/>
+          </a:bodyPr>
+          <a:lstStyle/>
+          <a:p>
+            <a:pPr algn="ctr"/>
+            <a:r>
+              <a:rPr lang="en-US" altLang="ko-KR" sz="1200" spc="-50" dirty="0"/>
+              <a:t>&lt;</a:t>
+            </a:r>
+            <a:r>
+              <a:rPr lang="ko-KR" altLang="en-US" sz="1200" spc="-50" dirty="0"/>
+              <a:t>한계오염피해곡선 </a:t>
+            </a:r>
+            <a:r>
+              <a:rPr lang="en-US" altLang="ko-KR" sz="1200" spc="-50" dirty="0"/>
+              <a:t>(</a:t>
+            </a:r>
+            <a:r>
+              <a:rPr lang="ko-KR" altLang="en-US" sz="1200" spc="-50" dirty="0"/>
+              <a:t>배출량 기준</a:t>
+            </a:r>
+            <a:r>
+              <a:rPr lang="en-US" altLang="ko-KR" sz="1200" spc="-50" dirty="0"/>
+              <a:t>)&gt;</a:t>
+            </a:r>
+            <a:endParaRPr lang="ko-KR" altLang="en-US" sz="1400" dirty="0"/>
+          </a:p>
+        </p:txBody>
+      </p:sp>
     </p:spTree>
     <p:extLst>
       <p:ext uri="{BB962C8B-B14F-4D97-AF65-F5344CB8AC3E}">
@@ -26562,8 +27063,8 @@
         </p:blipFill>
         <p:spPr bwMode="auto">
           <a:xfrm>
-            <a:off x="5221040" y="4171950"/>
-            <a:ext cx="5650161" cy="2415757"/>
+            <a:off x="6709533" y="4731965"/>
+            <a:ext cx="4396938" cy="1879935"/>
           </a:xfrm>
           <a:prstGeom prst="rect">
             <a:avLst/>
@@ -26593,6 +27094,59 @@
           </a:extLst>
         </p:spPr>
       </p:pic>
+      <p:sp>
+        <p:nvSpPr>
+          <p:cNvPr id="6" name="TextBox 5">
+            <a:extLst>
+              <a:ext uri="{FF2B5EF4-FFF2-40B4-BE49-F238E27FC236}">
+                <a16:creationId xmlns:a16="http://schemas.microsoft.com/office/drawing/2014/main" id="{FDCA0825-B178-930A-547F-84F209E756F9}"/>
+              </a:ext>
+            </a:extLst>
+          </p:cNvPr>
+          <p:cNvSpPr txBox="1"/>
+          <p:nvPr/>
+        </p:nvSpPr>
+        <p:spPr>
+          <a:xfrm>
+            <a:off x="7406140" y="4338581"/>
+            <a:ext cx="2578100" cy="276999"/>
+          </a:xfrm>
+          <a:prstGeom prst="rect">
+            <a:avLst/>
+          </a:prstGeom>
+          <a:noFill/>
+        </p:spPr>
+        <p:txBody>
+          <a:bodyPr wrap="square">
+            <a:spAutoFit/>
+          </a:bodyPr>
+          <a:lstStyle/>
+          <a:p>
+            <a:pPr algn="ctr"/>
+            <a:r>
+              <a:rPr lang="en-US" altLang="ko-KR" sz="1200" spc="-50" dirty="0"/>
+              <a:t>&lt;</a:t>
+            </a:r>
+            <a:r>
+              <a:rPr lang="ko-KR" altLang="en-US" sz="1200" spc="-50" dirty="0"/>
+              <a:t>한계오염피해곡선 </a:t>
+            </a:r>
+            <a:r>
+              <a:rPr lang="en-US" altLang="ko-KR" sz="1200" spc="-50" dirty="0"/>
+              <a:t>(</a:t>
+            </a:r>
+            <a:r>
+              <a:rPr lang="ko-KR" altLang="en-US" sz="1200" spc="-50" dirty="0"/>
+              <a:t>오염도 기준</a:t>
+            </a:r>
+            <a:r>
+              <a:rPr lang="en-US" altLang="ko-KR" sz="1200" spc="-50" dirty="0"/>
+              <a:t>)&gt;</a:t>
+            </a:r>
+            <a:endParaRPr lang="ko-KR" altLang="en-US" sz="1400" dirty="0"/>
+          </a:p>
+        </p:txBody>
+      </p:sp>
     </p:spTree>
     <p:extLst>
       <p:ext uri="{BB962C8B-B14F-4D97-AF65-F5344CB8AC3E}">
@@ -26631,10 +27185,10 @@
       </p:grpSpPr>
       <p:pic>
         <p:nvPicPr>
-          <p:cNvPr id="5" name="그림 4" descr="라인, 도표, 그래프, 스크린샷이(가) 표시된 사진&#10;&#10;AI 생성 콘텐츠는 정확하지 않을 수 있습니다.">
+          <p:cNvPr id="6" name="그림 6" descr="Cap 2014-06-19 09-36-44-926.png">
             <a:extLst>
               <a:ext uri="{FF2B5EF4-FFF2-40B4-BE49-F238E27FC236}">
-                <a16:creationId xmlns:a16="http://schemas.microsoft.com/office/drawing/2014/main" id="{559484D9-FD24-EA3F-50EE-4DE90F67786B}"/>
+                <a16:creationId xmlns:a16="http://schemas.microsoft.com/office/drawing/2014/main" id="{3DD99674-E0D8-FFC3-7CB0-FA2CB7D633BE}"/>
               </a:ext>
             </a:extLst>
           </p:cNvPr>
@@ -26643,21 +27197,50 @@
           </p:cNvPicPr>
           <p:nvPr/>
         </p:nvPicPr>
-        <p:blipFill>
-          <a:blip r:embed="rId2"/>
-          <a:srcRect l="2616" t="8859" b="4698"/>
+        <p:blipFill rotWithShape="1">
+          <a:blip r:embed="rId2">
+            <a:extLst>
+              <a:ext uri="{28A0092B-C50C-407E-A947-70E740481C1C}">
+                <a14:useLocalDpi xmlns:a14="http://schemas.microsoft.com/office/drawing/2010/main" val="0"/>
+              </a:ext>
+            </a:extLst>
+          </a:blip>
+          <a:srcRect l="20679" t="13577" r="20921" b="2122"/>
           <a:stretch>
             <a:fillRect/>
           </a:stretch>
         </p:blipFill>
-        <p:spPr>
+        <p:spPr bwMode="auto">
           <a:xfrm>
-            <a:off x="8244839" y="2217506"/>
-            <a:ext cx="3658371" cy="3717483"/>
+            <a:off x="8296712" y="2919392"/>
+            <a:ext cx="3531766" cy="2584980"/>
           </a:xfrm>
           <a:prstGeom prst="rect">
             <a:avLst/>
           </a:prstGeom>
+          <a:noFill/>
+          <a:ln>
+            <a:noFill/>
+          </a:ln>
+          <a:extLst>
+            <a:ext uri="{909E8E84-426E-40DD-AFC4-6F175D3DCCD1}">
+              <a14:hiddenFill xmlns:a14="http://schemas.microsoft.com/office/drawing/2010/main">
+                <a:solidFill>
+                  <a:srgbClr val="FFFFFF"/>
+                </a:solidFill>
+              </a14:hiddenFill>
+            </a:ext>
+            <a:ext uri="{91240B29-F687-4F45-9708-019B960494DF}">
+              <a14:hiddenLine xmlns:a14="http://schemas.microsoft.com/office/drawing/2010/main" w="9525">
+                <a:solidFill>
+                  <a:srgbClr val="000000"/>
+                </a:solidFill>
+                <a:miter lim="800000"/>
+                <a:headEnd/>
+                <a:tailEnd/>
+              </a14:hiddenLine>
+            </a:ext>
+          </a:extLst>
         </p:spPr>
       </p:pic>
       <p:sp>
@@ -26823,7 +27406,7 @@
         <p:spPr>
           <a:xfrm>
             <a:off x="288790" y="2135693"/>
-            <a:ext cx="8062730" cy="3738011"/>
+            <a:ext cx="8142146" cy="3368679"/>
           </a:xfrm>
           <a:prstGeom prst="rect">
             <a:avLst/>
@@ -27052,6 +27635,55 @@
               <a:rPr lang="en-US" altLang="ko-KR" sz="1600" spc="-50" dirty="0"/>
               <a:t>.</a:t>
             </a:r>
+          </a:p>
+        </p:txBody>
+      </p:sp>
+      <p:sp>
+        <p:nvSpPr>
+          <p:cNvPr id="9" name="TextBox 8">
+            <a:extLst>
+              <a:ext uri="{FF2B5EF4-FFF2-40B4-BE49-F238E27FC236}">
+                <a16:creationId xmlns:a16="http://schemas.microsoft.com/office/drawing/2014/main" id="{019BFC2A-ECBC-A4AB-CA17-D4E197486F1D}"/>
+              </a:ext>
+            </a:extLst>
+          </p:cNvPr>
+          <p:cNvSpPr txBox="1"/>
+          <p:nvPr/>
+        </p:nvSpPr>
+        <p:spPr>
+          <a:xfrm>
+            <a:off x="8974881" y="2501392"/>
+            <a:ext cx="2578100" cy="276999"/>
+          </a:xfrm>
+          <a:prstGeom prst="rect">
+            <a:avLst/>
+          </a:prstGeom>
+          <a:noFill/>
+        </p:spPr>
+        <p:txBody>
+          <a:bodyPr wrap="square">
+            <a:spAutoFit/>
+          </a:bodyPr>
+          <a:lstStyle/>
+          <a:p>
+            <a:pPr algn="ctr"/>
+            <a:r>
+              <a:rPr lang="en-US" altLang="ko-KR" sz="1200" spc="-50" dirty="0"/>
+              <a:t>&lt;</a:t>
+            </a:r>
+            <a:r>
+              <a:rPr lang="ko-KR" altLang="en-US" sz="1200" spc="-50" dirty="0" err="1"/>
+              <a:t>저감량과</a:t>
+            </a:r>
+            <a:r>
+              <a:rPr lang="ko-KR" altLang="en-US" sz="1200" spc="-50" dirty="0"/>
+              <a:t> 한계편익</a:t>
+            </a:r>
+            <a:r>
+              <a:rPr lang="en-US" altLang="ko-KR" sz="1200" spc="-50" dirty="0"/>
+              <a:t>&gt;</a:t>
+            </a:r>
+            <a:endParaRPr lang="ko-KR" altLang="en-US" sz="1400" dirty="0"/>
           </a:p>
         </p:txBody>
       </p:sp>
@@ -27388,10 +28020,10 @@
       </p:sp>
       <p:pic>
         <p:nvPicPr>
-          <p:cNvPr id="6" name="그림 5" descr="텍스트, 도표, 라인, 그래프이(가) 표시된 사진&#10;&#10;AI 생성 콘텐츠는 정확하지 않을 수 있습니다.">
+          <p:cNvPr id="5" name="그림 5" descr="Cap 2014-06-19 09-38-13-813.png">
             <a:extLst>
               <a:ext uri="{FF2B5EF4-FFF2-40B4-BE49-F238E27FC236}">
-                <a16:creationId xmlns:a16="http://schemas.microsoft.com/office/drawing/2014/main" id="{7409CC9C-603B-EE9F-6056-4FFBD83A5691}"/>
+                <a16:creationId xmlns:a16="http://schemas.microsoft.com/office/drawing/2014/main" id="{0B0F2371-6FBC-EAF8-53DF-982B13C33D67}"/>
               </a:ext>
             </a:extLst>
           </p:cNvPr>
@@ -27400,22 +28032,97 @@
           </p:cNvPicPr>
           <p:nvPr/>
         </p:nvPicPr>
-        <p:blipFill>
-          <a:blip r:embed="rId2"/>
+        <p:blipFill rotWithShape="1">
+          <a:blip r:embed="rId2">
+            <a:extLst>
+              <a:ext uri="{28A0092B-C50C-407E-A947-70E740481C1C}">
+                <a14:useLocalDpi xmlns:a14="http://schemas.microsoft.com/office/drawing/2010/main" val="0"/>
+              </a:ext>
+            </a:extLst>
+          </a:blip>
+          <a:srcRect l="6207" t="14156" r="5677" b="3555"/>
           <a:stretch>
             <a:fillRect/>
           </a:stretch>
         </p:blipFill>
-        <p:spPr>
+        <p:spPr bwMode="auto">
           <a:xfrm>
-            <a:off x="2256423" y="3577191"/>
-            <a:ext cx="6578368" cy="2808963"/>
+            <a:off x="2734811" y="4026716"/>
+            <a:ext cx="5763238" cy="2466363"/>
           </a:xfrm>
           <a:prstGeom prst="rect">
             <a:avLst/>
           </a:prstGeom>
+          <a:noFill/>
+          <a:ln>
+            <a:noFill/>
+          </a:ln>
+          <a:extLst>
+            <a:ext uri="{909E8E84-426E-40DD-AFC4-6F175D3DCCD1}">
+              <a14:hiddenFill xmlns:a14="http://schemas.microsoft.com/office/drawing/2010/main">
+                <a:solidFill>
+                  <a:srgbClr val="FFFFFF"/>
+                </a:solidFill>
+              </a14:hiddenFill>
+            </a:ext>
+            <a:ext uri="{91240B29-F687-4F45-9708-019B960494DF}">
+              <a14:hiddenLine xmlns:a14="http://schemas.microsoft.com/office/drawing/2010/main" w="9525">
+                <a:solidFill>
+                  <a:srgbClr val="000000"/>
+                </a:solidFill>
+                <a:miter lim="800000"/>
+                <a:headEnd/>
+                <a:tailEnd/>
+              </a14:hiddenLine>
+            </a:ext>
+          </a:extLst>
         </p:spPr>
       </p:pic>
+      <p:sp>
+        <p:nvSpPr>
+          <p:cNvPr id="9" name="TextBox 8">
+            <a:extLst>
+              <a:ext uri="{FF2B5EF4-FFF2-40B4-BE49-F238E27FC236}">
+                <a16:creationId xmlns:a16="http://schemas.microsoft.com/office/drawing/2014/main" id="{F9FB1707-BBBC-CD56-C1C8-94E2A6A5C087}"/>
+              </a:ext>
+            </a:extLst>
+          </p:cNvPr>
+          <p:cNvSpPr txBox="1"/>
+          <p:nvPr/>
+        </p:nvSpPr>
+        <p:spPr>
+          <a:xfrm>
+            <a:off x="4327380" y="3545821"/>
+            <a:ext cx="2578100" cy="276999"/>
+          </a:xfrm>
+          <a:prstGeom prst="rect">
+            <a:avLst/>
+          </a:prstGeom>
+          <a:noFill/>
+        </p:spPr>
+        <p:txBody>
+          <a:bodyPr wrap="square">
+            <a:spAutoFit/>
+          </a:bodyPr>
+          <a:lstStyle/>
+          <a:p>
+            <a:pPr algn="ctr"/>
+            <a:r>
+              <a:rPr lang="en-US" altLang="ko-KR" sz="1200" spc="-50" dirty="0"/>
+              <a:t>&lt;</a:t>
+            </a:r>
+            <a:r>
+              <a:rPr lang="ko-KR" altLang="en-US" sz="1200" spc="-50" dirty="0"/>
+              <a:t>한계저감비용</a:t>
+            </a:r>
+            <a:r>
+              <a:rPr lang="en-US" altLang="ko-KR" sz="1200" spc="-50" dirty="0"/>
+              <a:t>&gt;</a:t>
+            </a:r>
+            <a:endParaRPr lang="ko-KR" altLang="en-US" sz="1400" dirty="0"/>
+          </a:p>
+        </p:txBody>
+      </p:sp>
     </p:spTree>
     <p:extLst>
       <p:ext uri="{BB962C8B-B14F-4D97-AF65-F5344CB8AC3E}">

--- a/환경경제학/2026-1/환경경제학_Chapter_05.pptx
+++ b/환경경제학/2026-1/환경경제학_Chapter_05.pptx
@@ -18,9 +18,9 @@
     <p:sldId id="625" r:id="rId9"/>
     <p:sldId id="626" r:id="rId10"/>
     <p:sldId id="627" r:id="rId11"/>
-    <p:sldId id="628" r:id="rId12"/>
-    <p:sldId id="629" r:id="rId13"/>
-    <p:sldId id="630" r:id="rId14"/>
+    <p:sldId id="629" r:id="rId12"/>
+    <p:sldId id="630" r:id="rId13"/>
+    <p:sldId id="628" r:id="rId14"/>
     <p:sldId id="600" r:id="rId15"/>
     <p:sldId id="441" r:id="rId16"/>
     <p:sldId id="443" r:id="rId17"/>
@@ -232,7 +232,7 @@
           <a:p>
             <a:fld id="{4A5E00EF-AEA4-43E2-9451-8F9C59A39471}" type="datetimeFigureOut">
               <a:rPr lang="ko-KR" altLang="en-US" smtClean="0"/>
-              <a:t>2026-09-30</a:t>
+              <a:t>2026-10-01</a:t>
             </a:fld>
             <a:endParaRPr lang="ko-KR" altLang="en-US"/>
           </a:p>
@@ -738,7 +738,7 @@
           <a:p>
             <a:fld id="{CD32C56F-BD27-4999-9E6D-D4EACE3DA9F4}" type="datetime1">
               <a:rPr lang="ko-KR" altLang="en-US" smtClean="0"/>
-              <a:t>2026-09-30</a:t>
+              <a:t>2026-10-01</a:t>
             </a:fld>
             <a:endParaRPr lang="ko-KR" altLang="en-US"/>
           </a:p>
@@ -952,7 +952,7 @@
           <a:p>
             <a:fld id="{8EF4A19C-72C8-45CA-8E3F-68A7FA345D6C}" type="datetime1">
               <a:rPr lang="ko-KR" altLang="en-US" smtClean="0"/>
-              <a:t>2026-09-30</a:t>
+              <a:t>2026-10-01</a:t>
             </a:fld>
             <a:endParaRPr lang="ko-KR" altLang="en-US"/>
           </a:p>
@@ -1176,7 +1176,7 @@
           <a:p>
             <a:fld id="{56A175B2-010B-4341-954C-5F8F5C70B124}" type="datetime1">
               <a:rPr lang="ko-KR" altLang="en-US" smtClean="0"/>
-              <a:t>2026-09-30</a:t>
+              <a:t>2026-10-01</a:t>
             </a:fld>
             <a:endParaRPr lang="ko-KR" altLang="en-US"/>
           </a:p>
@@ -1390,7 +1390,7 @@
           <a:p>
             <a:fld id="{16B83F9E-22C9-45CA-9E85-070F1D3EF530}" type="datetime1">
               <a:rPr lang="ko-KR" altLang="en-US" smtClean="0"/>
-              <a:t>2026-09-30</a:t>
+              <a:t>2026-10-01</a:t>
             </a:fld>
             <a:endParaRPr lang="ko-KR" altLang="en-US"/>
           </a:p>
@@ -1681,7 +1681,7 @@
           <a:p>
             <a:fld id="{03278F45-FB3C-4C4D-B89A-7BC3F5F229F6}" type="datetime1">
               <a:rPr lang="ko-KR" altLang="en-US" smtClean="0"/>
-              <a:t>2026-09-30</a:t>
+              <a:t>2026-10-01</a:t>
             </a:fld>
             <a:endParaRPr lang="ko-KR" altLang="en-US"/>
           </a:p>
@@ -2074,7 +2074,7 @@
           <a:p>
             <a:fld id="{38FDAC3C-35A6-415C-9F03-738A6AC328B1}" type="datetime1">
               <a:rPr lang="ko-KR" altLang="en-US" smtClean="0"/>
-              <a:t>2026-09-30</a:t>
+              <a:t>2026-10-01</a:t>
             </a:fld>
             <a:endParaRPr lang="ko-KR" altLang="en-US"/>
           </a:p>
@@ -3668,7 +3668,7 @@
           <a:p>
             <a:fld id="{507A0DF1-AEE6-4B0D-89D2-351E7B3EF65C}" type="datetime1">
               <a:rPr lang="ko-KR" altLang="en-US" smtClean="0"/>
-              <a:t>2026-09-30</a:t>
+              <a:t>2026-10-01</a:t>
             </a:fld>
             <a:endParaRPr lang="ko-KR" altLang="en-US"/>
           </a:p>
@@ -4096,7 +4096,7 @@
           <a:p>
             <a:fld id="{CA93B8C9-630F-4D57-944D-04FD37CECCD3}" type="datetime1">
               <a:rPr lang="ko-KR" altLang="en-US" smtClean="0"/>
-              <a:t>2026-09-30</a:t>
+              <a:t>2026-10-01</a:t>
             </a:fld>
             <a:endParaRPr lang="ko-KR" altLang="en-US"/>
           </a:p>
@@ -4253,7 +4253,7 @@
           <a:p>
             <a:fld id="{E986165A-AC43-4902-9541-874ECD310BA3}" type="datetime1">
               <a:rPr lang="ko-KR" altLang="en-US" smtClean="0"/>
-              <a:t>2026-09-30</a:t>
+              <a:t>2026-10-01</a:t>
             </a:fld>
             <a:endParaRPr lang="ko-KR" altLang="en-US"/>
           </a:p>
@@ -4580,7 +4580,7 @@
           <a:p>
             <a:fld id="{47E6EE6D-2B0E-43A9-87A2-7354CDB998F4}" type="datetime1">
               <a:rPr lang="ko-KR" altLang="en-US" smtClean="0"/>
-              <a:t>2026-09-30</a:t>
+              <a:t>2026-10-01</a:t>
             </a:fld>
             <a:endParaRPr lang="ko-KR" altLang="en-US"/>
           </a:p>
@@ -4884,7 +4884,7 @@
           <a:p>
             <a:fld id="{5CC5944E-0BC8-4FAA-9F94-6B4B05834E10}" type="datetime1">
               <a:rPr lang="ko-KR" altLang="en-US" smtClean="0"/>
-              <a:t>2026-09-30</a:t>
+              <a:t>2026-10-01</a:t>
             </a:fld>
             <a:endParaRPr lang="ko-KR" altLang="en-US"/>
           </a:p>
@@ -7578,6 +7578,924 @@
         <p:cNvPr id="1" name="">
           <a:extLst>
             <a:ext uri="{FF2B5EF4-FFF2-40B4-BE49-F238E27FC236}">
+              <a16:creationId xmlns:a16="http://schemas.microsoft.com/office/drawing/2014/main" id="{26D3AAE5-A43F-B994-1553-352CADF86A87}"/>
+            </a:ext>
+          </a:extLst>
+        </p:cNvPr>
+        <p:cNvGrpSpPr/>
+        <p:nvPr/>
+      </p:nvGrpSpPr>
+      <p:grpSpPr>
+        <a:xfrm>
+          <a:off x="0" y="0"/>
+          <a:ext cx="0" cy="0"/>
+          <a:chOff x="0" y="0"/>
+          <a:chExt cx="0" cy="0"/>
+        </a:xfrm>
+      </p:grpSpPr>
+      <p:sp>
+        <p:nvSpPr>
+          <p:cNvPr id="2" name="제목 1">
+            <a:extLst>
+              <a:ext uri="{FF2B5EF4-FFF2-40B4-BE49-F238E27FC236}">
+                <a16:creationId xmlns:a16="http://schemas.microsoft.com/office/drawing/2014/main" id="{80D1BE3A-1C12-EDB1-6788-6D19F161A620}"/>
+              </a:ext>
+            </a:extLst>
+          </p:cNvPr>
+          <p:cNvSpPr>
+            <a:spLocks noGrp="1"/>
+          </p:cNvSpPr>
+          <p:nvPr>
+            <p:ph type="title"/>
+          </p:nvPr>
+        </p:nvSpPr>
+        <p:spPr/>
+        <p:txBody>
+          <a:bodyPr/>
+          <a:lstStyle/>
+          <a:p>
+            <a:r>
+              <a:rPr lang="ko-KR" altLang="en-US" dirty="0"/>
+              <a:t>환경의 최적이용</a:t>
+            </a:r>
+          </a:p>
+        </p:txBody>
+      </p:sp>
+      <p:sp>
+        <p:nvSpPr>
+          <p:cNvPr id="4" name="슬라이드 번호 개체 틀 3">
+            <a:extLst>
+              <a:ext uri="{FF2B5EF4-FFF2-40B4-BE49-F238E27FC236}">
+                <a16:creationId xmlns:a16="http://schemas.microsoft.com/office/drawing/2014/main" id="{3167FF99-30D2-1BC7-EF15-91D166E6645A}"/>
+              </a:ext>
+            </a:extLst>
+          </p:cNvPr>
+          <p:cNvSpPr>
+            <a:spLocks noGrp="1"/>
+          </p:cNvSpPr>
+          <p:nvPr>
+            <p:ph type="sldNum" sz="quarter" idx="12"/>
+          </p:nvPr>
+        </p:nvSpPr>
+        <p:spPr/>
+        <p:txBody>
+          <a:bodyPr/>
+          <a:lstStyle/>
+          <a:p>
+            <a:fld id="{109C872D-39A9-4065-8BF3-6A613116E2A1}" type="slidenum">
+              <a:rPr lang="ko-KR" altLang="en-US" smtClean="0"/>
+              <a:t>11</a:t>
+            </a:fld>
+            <a:endParaRPr lang="ko-KR" altLang="en-US"/>
+          </a:p>
+        </p:txBody>
+      </p:sp>
+      <p:sp>
+        <p:nvSpPr>
+          <p:cNvPr id="8" name="TextBox 7">
+            <a:extLst>
+              <a:ext uri="{FF2B5EF4-FFF2-40B4-BE49-F238E27FC236}">
+                <a16:creationId xmlns:a16="http://schemas.microsoft.com/office/drawing/2014/main" id="{0228059C-AF28-EB58-B45A-3367E2D098C6}"/>
+              </a:ext>
+            </a:extLst>
+          </p:cNvPr>
+          <p:cNvSpPr txBox="1"/>
+          <p:nvPr/>
+        </p:nvSpPr>
+        <p:spPr>
+          <a:xfrm>
+            <a:off x="288790" y="787394"/>
+            <a:ext cx="11414260" cy="1522020"/>
+          </a:xfrm>
+          <a:prstGeom prst="rect">
+            <a:avLst/>
+          </a:prstGeom>
+          <a:noFill/>
+        </p:spPr>
+        <p:txBody>
+          <a:bodyPr wrap="square" rtlCol="0" anchor="t">
+            <a:spAutoFit/>
+          </a:bodyPr>
+          <a:lstStyle/>
+          <a:p>
+            <a:pPr marL="377825" indent="-285750">
+              <a:lnSpc>
+                <a:spcPct val="150000"/>
+              </a:lnSpc>
+              <a:buFont typeface="Arial" panose="020B0604020202020204" pitchFamily="34" charset="0"/>
+              <a:buChar char="•"/>
+            </a:pPr>
+            <a:r>
+              <a:rPr lang="ko-KR" altLang="en-US" sz="1600" spc="-50" dirty="0"/>
+              <a:t>앞서 설명한 환경정책의 편익과 비용을 나타내는 개념들을 이용하여 사회적으로 바람직한 수준의 오염물질 배출량 혹은 </a:t>
+            </a:r>
+            <a:r>
+              <a:rPr lang="ko-KR" altLang="en-US" sz="1600" spc="-50" dirty="0" err="1"/>
+              <a:t>저감량을</a:t>
+            </a:r>
+            <a:r>
+              <a:rPr lang="ko-KR" altLang="en-US" sz="1600" spc="-50" dirty="0"/>
+              <a:t> 도출할 수 있다</a:t>
+            </a:r>
+            <a:r>
+              <a:rPr lang="en-US" altLang="ko-KR" sz="1600" spc="-50" dirty="0"/>
+              <a:t>.</a:t>
+            </a:r>
+          </a:p>
+          <a:p>
+            <a:pPr marL="892175" lvl="1" indent="-342900">
+              <a:lnSpc>
+                <a:spcPct val="150000"/>
+              </a:lnSpc>
+              <a:buFont typeface="+mj-lt"/>
+              <a:buAutoNum type="arabicPeriod"/>
+            </a:pPr>
+            <a:r>
+              <a:rPr lang="ko-KR" altLang="en-US" sz="1600" spc="-50" dirty="0"/>
+              <a:t>배출량을 기준으로 하는 경우</a:t>
+            </a:r>
+            <a:r>
+              <a:rPr lang="en-US" altLang="ko-KR" sz="1600" spc="-50" dirty="0"/>
+              <a:t>, </a:t>
+            </a:r>
+            <a:r>
+              <a:rPr lang="ko-KR" altLang="en-US" sz="1600" spc="-50" dirty="0"/>
+              <a:t>최적 배출량은 오염물질 배출로 인한 한계오염피해와 오염물질 배출을 한 단위 줄이는데 소요되는 한계저감비용이 같게 되는 배출량이다</a:t>
+            </a:r>
+            <a:r>
+              <a:rPr lang="en-US" altLang="ko-KR" sz="1600" spc="-50" dirty="0"/>
+              <a:t>.</a:t>
+            </a:r>
+          </a:p>
+        </p:txBody>
+      </p:sp>
+      <p:sp>
+        <p:nvSpPr>
+          <p:cNvPr id="12" name="TextBox 11">
+            <a:extLst>
+              <a:ext uri="{FF2B5EF4-FFF2-40B4-BE49-F238E27FC236}">
+                <a16:creationId xmlns:a16="http://schemas.microsoft.com/office/drawing/2014/main" id="{C16C825C-BF92-F0E1-0A47-00174D9701F1}"/>
+              </a:ext>
+            </a:extLst>
+          </p:cNvPr>
+          <p:cNvSpPr txBox="1"/>
+          <p:nvPr/>
+        </p:nvSpPr>
+        <p:spPr>
+          <a:xfrm>
+            <a:off x="288790" y="2335170"/>
+            <a:ext cx="7948430" cy="2630015"/>
+          </a:xfrm>
+          <a:prstGeom prst="rect">
+            <a:avLst/>
+          </a:prstGeom>
+          <a:noFill/>
+        </p:spPr>
+        <p:txBody>
+          <a:bodyPr wrap="square" rtlCol="0" anchor="t">
+            <a:spAutoFit/>
+          </a:bodyPr>
+          <a:lstStyle/>
+          <a:p>
+            <a:pPr marL="1349375" lvl="2" indent="-342900">
+              <a:lnSpc>
+                <a:spcPct val="150000"/>
+              </a:lnSpc>
+              <a:buFont typeface="Wingdings" panose="05000000000000000000" pitchFamily="2" charset="2"/>
+              <a:buChar char="ü"/>
+            </a:pPr>
+            <a:r>
+              <a:rPr lang="ko-KR" altLang="en-US" sz="1600" spc="-50" dirty="0"/>
+              <a:t>아래 그림에서 최적 배출량은 </a:t>
+            </a:r>
+            <a:r>
+              <a:rPr lang="en-US" altLang="ko-KR" sz="1600" spc="-50" dirty="0"/>
+              <a:t>e*</a:t>
+            </a:r>
+            <a:r>
+              <a:rPr lang="ko-KR" altLang="en-US" sz="1600" spc="-50" dirty="0"/>
+              <a:t>로</a:t>
+            </a:r>
+            <a:r>
+              <a:rPr lang="en-US" altLang="ko-KR" sz="1600" spc="-50" dirty="0"/>
+              <a:t> </a:t>
+            </a:r>
+            <a:r>
+              <a:rPr lang="ko-KR" altLang="en-US" sz="1600" spc="-50" dirty="0"/>
+              <a:t>표시되어 있다</a:t>
+            </a:r>
+            <a:r>
+              <a:rPr lang="en-US" altLang="ko-KR" sz="1600" spc="-50" dirty="0"/>
+              <a:t>.</a:t>
+            </a:r>
+          </a:p>
+          <a:p>
+            <a:pPr marL="1349375" lvl="2" indent="-342900">
+              <a:lnSpc>
+                <a:spcPct val="150000"/>
+              </a:lnSpc>
+              <a:buFont typeface="Wingdings" panose="05000000000000000000" pitchFamily="2" charset="2"/>
+              <a:buChar char="ü"/>
+            </a:pPr>
+            <a:r>
+              <a:rPr lang="ko-KR" altLang="en-US" sz="1600" spc="-50" dirty="0"/>
+              <a:t>현재 배출량이 </a:t>
+            </a:r>
+            <a:r>
+              <a:rPr lang="en-US" altLang="ko-KR" sz="1600" spc="-50" dirty="0"/>
+              <a:t>e* </a:t>
+            </a:r>
+            <a:r>
+              <a:rPr lang="ko-KR" altLang="en-US" sz="1600" spc="-50" dirty="0"/>
+              <a:t>보다 크다면 한 단위의 배출감소로 인한 오염피해 감소분이 저감비용보다 크기 때문에</a:t>
+            </a:r>
+            <a:r>
+              <a:rPr lang="en-US" altLang="ko-KR" sz="1600" spc="-50" dirty="0"/>
+              <a:t>, </a:t>
+            </a:r>
+            <a:r>
+              <a:rPr lang="ko-KR" altLang="en-US" sz="1600" spc="-50" dirty="0"/>
+              <a:t>배출량을 줄여야 사회 전체 순편익이 늘어난다</a:t>
+            </a:r>
+            <a:r>
+              <a:rPr lang="en-US" altLang="ko-KR" sz="1600" spc="-50" dirty="0"/>
+              <a:t>.</a:t>
+            </a:r>
+          </a:p>
+          <a:p>
+            <a:pPr marL="1349375" lvl="2" indent="-342900">
+              <a:lnSpc>
+                <a:spcPct val="150000"/>
+              </a:lnSpc>
+              <a:buFont typeface="Wingdings" panose="05000000000000000000" pitchFamily="2" charset="2"/>
+              <a:buChar char="ü"/>
+            </a:pPr>
+            <a:r>
+              <a:rPr lang="ko-KR" altLang="en-US" sz="1600" spc="-50" dirty="0"/>
+              <a:t>반대로</a:t>
+            </a:r>
+            <a:r>
+              <a:rPr lang="en-US" altLang="ko-KR" sz="1600" spc="-50" dirty="0"/>
+              <a:t>, </a:t>
+            </a:r>
+            <a:r>
+              <a:rPr lang="ko-KR" altLang="en-US" sz="1600" spc="-50" dirty="0"/>
+              <a:t>현재 배출량이 </a:t>
+            </a:r>
+            <a:r>
+              <a:rPr lang="en-US" altLang="ko-KR" sz="1600" spc="-50" dirty="0"/>
+              <a:t>e*</a:t>
+            </a:r>
+            <a:r>
+              <a:rPr lang="ko-KR" altLang="en-US" sz="1600" spc="-50" dirty="0"/>
+              <a:t>보다</a:t>
+            </a:r>
+            <a:r>
+              <a:rPr lang="en-US" altLang="ko-KR" sz="1600" spc="-50" dirty="0"/>
+              <a:t> </a:t>
+            </a:r>
+            <a:r>
+              <a:rPr lang="ko-KR" altLang="en-US" sz="1600" spc="-50" dirty="0"/>
+              <a:t>작다면 배출을 늘리면서 절약되는 저감비용이 그 때문에 늘어나는 피해액보다 더 크기 때문에</a:t>
+            </a:r>
+            <a:r>
+              <a:rPr lang="en-US" altLang="ko-KR" sz="1600" spc="-50" dirty="0"/>
+              <a:t>, </a:t>
+            </a:r>
+            <a:r>
+              <a:rPr lang="ko-KR" altLang="en-US" sz="1600" spc="-50" dirty="0"/>
+              <a:t>배출량을 늘려야 사회 전체 순편익이 늘어난다</a:t>
+            </a:r>
+            <a:r>
+              <a:rPr lang="en-US" altLang="ko-KR" sz="1600" spc="-50" dirty="0"/>
+              <a:t>.</a:t>
+            </a:r>
+          </a:p>
+        </p:txBody>
+      </p:sp>
+      <p:pic>
+        <p:nvPicPr>
+          <p:cNvPr id="5" name="그림 7" descr="Cap 2014-06-19 09-38-54-334.png">
+            <a:extLst>
+              <a:ext uri="{FF2B5EF4-FFF2-40B4-BE49-F238E27FC236}">
+                <a16:creationId xmlns:a16="http://schemas.microsoft.com/office/drawing/2014/main" id="{BEB4EBA8-249E-4DE3-10BD-262D86CA76A4}"/>
+              </a:ext>
+            </a:extLst>
+          </p:cNvPr>
+          <p:cNvPicPr>
+            <a:picLocks noChangeAspect="1"/>
+          </p:cNvPicPr>
+          <p:nvPr/>
+        </p:nvPicPr>
+        <p:blipFill rotWithShape="1">
+          <a:blip r:embed="rId2">
+            <a:extLst>
+              <a:ext uri="{28A0092B-C50C-407E-A947-70E740481C1C}">
+                <a14:useLocalDpi xmlns:a14="http://schemas.microsoft.com/office/drawing/2010/main" val="0"/>
+              </a:ext>
+            </a:extLst>
+          </a:blip>
+          <a:srcRect l="6045" t="19463" r="50501"/>
+          <a:stretch>
+            <a:fillRect/>
+          </a:stretch>
+        </p:blipFill>
+        <p:spPr bwMode="auto">
+          <a:xfrm>
+            <a:off x="8531604" y="3473042"/>
+            <a:ext cx="2550254" cy="2372948"/>
+          </a:xfrm>
+          <a:prstGeom prst="rect">
+            <a:avLst/>
+          </a:prstGeom>
+          <a:noFill/>
+          <a:ln>
+            <a:noFill/>
+          </a:ln>
+          <a:extLst>
+            <a:ext uri="{909E8E84-426E-40DD-AFC4-6F175D3DCCD1}">
+              <a14:hiddenFill xmlns:a14="http://schemas.microsoft.com/office/drawing/2010/main">
+                <a:solidFill>
+                  <a:srgbClr val="FFFFFF"/>
+                </a:solidFill>
+              </a14:hiddenFill>
+            </a:ext>
+            <a:ext uri="{91240B29-F687-4F45-9708-019B960494DF}">
+              <a14:hiddenLine xmlns:a14="http://schemas.microsoft.com/office/drawing/2010/main" w="9525">
+                <a:solidFill>
+                  <a:srgbClr val="000000"/>
+                </a:solidFill>
+                <a:miter lim="800000"/>
+                <a:headEnd/>
+                <a:tailEnd/>
+              </a14:hiddenLine>
+            </a:ext>
+          </a:extLst>
+        </p:spPr>
+      </p:pic>
+      <p:sp>
+        <p:nvSpPr>
+          <p:cNvPr id="7" name="TextBox 6">
+            <a:extLst>
+              <a:ext uri="{FF2B5EF4-FFF2-40B4-BE49-F238E27FC236}">
+                <a16:creationId xmlns:a16="http://schemas.microsoft.com/office/drawing/2014/main" id="{51A80B09-F268-A6FD-7BC9-1C54CCBEB68E}"/>
+              </a:ext>
+            </a:extLst>
+          </p:cNvPr>
+          <p:cNvSpPr txBox="1"/>
+          <p:nvPr/>
+        </p:nvSpPr>
+        <p:spPr>
+          <a:xfrm>
+            <a:off x="9141146" y="3107959"/>
+            <a:ext cx="1512872" cy="276999"/>
+          </a:xfrm>
+          <a:prstGeom prst="rect">
+            <a:avLst/>
+          </a:prstGeom>
+          <a:noFill/>
+        </p:spPr>
+        <p:txBody>
+          <a:bodyPr wrap="square">
+            <a:spAutoFit/>
+          </a:bodyPr>
+          <a:lstStyle/>
+          <a:p>
+            <a:pPr algn="ctr"/>
+            <a:r>
+              <a:rPr lang="en-US" altLang="ko-KR" sz="1200" spc="-50" dirty="0"/>
+              <a:t>&lt;</a:t>
+            </a:r>
+            <a:r>
+              <a:rPr lang="ko-KR" altLang="en-US" sz="1200" spc="-50" dirty="0"/>
+              <a:t>최적 배출량</a:t>
+            </a:r>
+            <a:r>
+              <a:rPr lang="en-US" altLang="ko-KR" sz="1200" spc="-50" dirty="0"/>
+              <a:t>&gt;</a:t>
+            </a:r>
+            <a:endParaRPr lang="ko-KR" altLang="en-US" sz="1400" dirty="0"/>
+          </a:p>
+        </p:txBody>
+      </p:sp>
+    </p:spTree>
+    <p:extLst>
+      <p:ext uri="{BB962C8B-B14F-4D97-AF65-F5344CB8AC3E}">
+        <p14:creationId xmlns:p14="http://schemas.microsoft.com/office/powerpoint/2010/main" val="1261661617"/>
+      </p:ext>
+    </p:extLst>
+  </p:cSld>
+  <p:clrMapOvr>
+    <a:masterClrMapping/>
+  </p:clrMapOvr>
+</p:sld>
+</file>
+
+<file path=ppt/slides/slide12.xml><?xml version="1.0" encoding="utf-8"?>
+<p:sld xmlns:a="http://schemas.openxmlformats.org/drawingml/2006/main" xmlns:r="http://schemas.openxmlformats.org/officeDocument/2006/relationships" xmlns:p="http://schemas.openxmlformats.org/presentationml/2006/main">
+  <p:cSld>
+    <p:spTree>
+      <p:nvGrpSpPr>
+        <p:cNvPr id="1" name="">
+          <a:extLst>
+            <a:ext uri="{FF2B5EF4-FFF2-40B4-BE49-F238E27FC236}">
+              <a16:creationId xmlns:a16="http://schemas.microsoft.com/office/drawing/2014/main" id="{0527CDE9-8B56-EE43-13A1-99E9AE5317EF}"/>
+            </a:ext>
+          </a:extLst>
+        </p:cNvPr>
+        <p:cNvGrpSpPr/>
+        <p:nvPr/>
+      </p:nvGrpSpPr>
+      <p:grpSpPr>
+        <a:xfrm>
+          <a:off x="0" y="0"/>
+          <a:ext cx="0" cy="0"/>
+          <a:chOff x="0" y="0"/>
+          <a:chExt cx="0" cy="0"/>
+        </a:xfrm>
+      </p:grpSpPr>
+      <p:sp>
+        <p:nvSpPr>
+          <p:cNvPr id="2" name="제목 1">
+            <a:extLst>
+              <a:ext uri="{FF2B5EF4-FFF2-40B4-BE49-F238E27FC236}">
+                <a16:creationId xmlns:a16="http://schemas.microsoft.com/office/drawing/2014/main" id="{B8471791-42AE-F261-5B13-9E2F56E461F4}"/>
+              </a:ext>
+            </a:extLst>
+          </p:cNvPr>
+          <p:cNvSpPr>
+            <a:spLocks noGrp="1"/>
+          </p:cNvSpPr>
+          <p:nvPr>
+            <p:ph type="title"/>
+          </p:nvPr>
+        </p:nvSpPr>
+        <p:spPr/>
+        <p:txBody>
+          <a:bodyPr/>
+          <a:lstStyle/>
+          <a:p>
+            <a:r>
+              <a:rPr lang="ko-KR" altLang="en-US" dirty="0"/>
+              <a:t>환경의 최적이용</a:t>
+            </a:r>
+          </a:p>
+        </p:txBody>
+      </p:sp>
+      <p:sp>
+        <p:nvSpPr>
+          <p:cNvPr id="4" name="슬라이드 번호 개체 틀 3">
+            <a:extLst>
+              <a:ext uri="{FF2B5EF4-FFF2-40B4-BE49-F238E27FC236}">
+                <a16:creationId xmlns:a16="http://schemas.microsoft.com/office/drawing/2014/main" id="{1363A50E-DB0D-B55E-1CEE-C3DA3B6BDE0A}"/>
+              </a:ext>
+            </a:extLst>
+          </p:cNvPr>
+          <p:cNvSpPr>
+            <a:spLocks noGrp="1"/>
+          </p:cNvSpPr>
+          <p:nvPr>
+            <p:ph type="sldNum" sz="quarter" idx="12"/>
+          </p:nvPr>
+        </p:nvSpPr>
+        <p:spPr/>
+        <p:txBody>
+          <a:bodyPr/>
+          <a:lstStyle/>
+          <a:p>
+            <a:fld id="{109C872D-39A9-4065-8BF3-6A613116E2A1}" type="slidenum">
+              <a:rPr lang="ko-KR" altLang="en-US" smtClean="0"/>
+              <a:t>12</a:t>
+            </a:fld>
+            <a:endParaRPr lang="ko-KR" altLang="en-US"/>
+          </a:p>
+        </p:txBody>
+      </p:sp>
+      <p:sp>
+        <p:nvSpPr>
+          <p:cNvPr id="8" name="TextBox 7">
+            <a:extLst>
+              <a:ext uri="{FF2B5EF4-FFF2-40B4-BE49-F238E27FC236}">
+                <a16:creationId xmlns:a16="http://schemas.microsoft.com/office/drawing/2014/main" id="{E54A0A24-1940-4F60-9CF9-763BF238581D}"/>
+              </a:ext>
+            </a:extLst>
+          </p:cNvPr>
+          <p:cNvSpPr txBox="1"/>
+          <p:nvPr/>
+        </p:nvSpPr>
+        <p:spPr>
+          <a:xfrm>
+            <a:off x="288790" y="787394"/>
+            <a:ext cx="7948430" cy="783356"/>
+          </a:xfrm>
+          <a:prstGeom prst="rect">
+            <a:avLst/>
+          </a:prstGeom>
+          <a:noFill/>
+        </p:spPr>
+        <p:txBody>
+          <a:bodyPr wrap="square" rtlCol="0" anchor="t">
+            <a:spAutoFit/>
+          </a:bodyPr>
+          <a:lstStyle/>
+          <a:p>
+            <a:pPr marL="892175" lvl="1" indent="-342900">
+              <a:lnSpc>
+                <a:spcPct val="150000"/>
+              </a:lnSpc>
+              <a:buFont typeface="+mj-lt"/>
+              <a:buAutoNum type="arabicPeriod" startAt="2"/>
+            </a:pPr>
+            <a:r>
+              <a:rPr lang="ko-KR" altLang="en-US" sz="1600" spc="-50" dirty="0" err="1"/>
+              <a:t>저감량을</a:t>
+            </a:r>
+            <a:r>
+              <a:rPr lang="ko-KR" altLang="en-US" sz="1600" spc="-50" dirty="0"/>
+              <a:t> 기준으로 하는 경우</a:t>
+            </a:r>
+            <a:r>
+              <a:rPr lang="en-US" altLang="ko-KR" sz="1600" spc="-50" dirty="0"/>
+              <a:t>, </a:t>
+            </a:r>
+            <a:r>
+              <a:rPr lang="ko-KR" altLang="en-US" sz="1600" spc="-50" dirty="0"/>
+              <a:t>최적 </a:t>
+            </a:r>
+            <a:r>
+              <a:rPr lang="ko-KR" altLang="en-US" sz="1600" spc="-50" dirty="0" err="1"/>
+              <a:t>저감량은</a:t>
+            </a:r>
+            <a:r>
+              <a:rPr lang="ko-KR" altLang="en-US" sz="1600" spc="-50" dirty="0"/>
+              <a:t> 저감의 한계편익과 한계저감비용이 일치하는 수준에서 결정된다</a:t>
+            </a:r>
+            <a:r>
+              <a:rPr lang="en-US" altLang="ko-KR" sz="1600" spc="-50" dirty="0"/>
+              <a:t>.</a:t>
+            </a:r>
+          </a:p>
+        </p:txBody>
+      </p:sp>
+      <p:sp>
+        <p:nvSpPr>
+          <p:cNvPr id="12" name="TextBox 11">
+            <a:extLst>
+              <a:ext uri="{FF2B5EF4-FFF2-40B4-BE49-F238E27FC236}">
+                <a16:creationId xmlns:a16="http://schemas.microsoft.com/office/drawing/2014/main" id="{3E5ED435-A941-3548-7350-8B0F2943F033}"/>
+              </a:ext>
+            </a:extLst>
+          </p:cNvPr>
+          <p:cNvSpPr txBox="1"/>
+          <p:nvPr/>
+        </p:nvSpPr>
+        <p:spPr>
+          <a:xfrm>
+            <a:off x="288790" y="1603650"/>
+            <a:ext cx="7948430" cy="2630015"/>
+          </a:xfrm>
+          <a:prstGeom prst="rect">
+            <a:avLst/>
+          </a:prstGeom>
+          <a:noFill/>
+        </p:spPr>
+        <p:txBody>
+          <a:bodyPr wrap="square" rtlCol="0" anchor="t">
+            <a:spAutoFit/>
+          </a:bodyPr>
+          <a:lstStyle/>
+          <a:p>
+            <a:pPr marL="1349375" lvl="2" indent="-342900">
+              <a:lnSpc>
+                <a:spcPct val="150000"/>
+              </a:lnSpc>
+              <a:buFont typeface="Wingdings" panose="05000000000000000000" pitchFamily="2" charset="2"/>
+              <a:buChar char="ü"/>
+            </a:pPr>
+            <a:r>
+              <a:rPr lang="ko-KR" altLang="en-US" sz="1600" spc="-50"/>
+              <a:t>오른쪽 </a:t>
+            </a:r>
+            <a:r>
+              <a:rPr lang="ko-KR" altLang="en-US" sz="1600" spc="-50" dirty="0"/>
+              <a:t>그림에서 최적 </a:t>
+            </a:r>
+            <a:r>
+              <a:rPr lang="ko-KR" altLang="en-US" sz="1600" spc="-50" dirty="0" err="1"/>
+              <a:t>저감량은</a:t>
+            </a:r>
+            <a:r>
+              <a:rPr lang="ko-KR" altLang="en-US" sz="1600" spc="-50" dirty="0"/>
+              <a:t> </a:t>
+            </a:r>
+            <a:r>
+              <a:rPr lang="en-US" altLang="ko-KR" sz="1600" spc="-50" dirty="0"/>
+              <a:t>a*</a:t>
+            </a:r>
+            <a:r>
+              <a:rPr lang="ko-KR" altLang="en-US" sz="1600" spc="-50" dirty="0"/>
+              <a:t>로</a:t>
+            </a:r>
+            <a:r>
+              <a:rPr lang="en-US" altLang="ko-KR" sz="1600" spc="-50" dirty="0"/>
+              <a:t> </a:t>
+            </a:r>
+            <a:r>
+              <a:rPr lang="ko-KR" altLang="en-US" sz="1600" spc="-50" dirty="0"/>
+              <a:t>표시되어 있다</a:t>
+            </a:r>
+            <a:r>
+              <a:rPr lang="en-US" altLang="ko-KR" sz="1600" spc="-50" dirty="0"/>
+              <a:t>.</a:t>
+            </a:r>
+          </a:p>
+          <a:p>
+            <a:pPr marL="1349375" lvl="2" indent="-342900">
+              <a:lnSpc>
+                <a:spcPct val="150000"/>
+              </a:lnSpc>
+              <a:buFont typeface="Wingdings" panose="05000000000000000000" pitchFamily="2" charset="2"/>
+              <a:buChar char="ü"/>
+            </a:pPr>
+            <a:endParaRPr lang="en-US" altLang="ko-KR" sz="1600" spc="-50" dirty="0"/>
+          </a:p>
+          <a:p>
+            <a:pPr marL="1349375" lvl="2" indent="-342900">
+              <a:lnSpc>
+                <a:spcPct val="150000"/>
+              </a:lnSpc>
+              <a:buFont typeface="Wingdings" panose="05000000000000000000" pitchFamily="2" charset="2"/>
+              <a:buChar char="ü"/>
+            </a:pPr>
+            <a:endParaRPr lang="en-US" altLang="ko-KR" sz="1600" spc="-50" dirty="0"/>
+          </a:p>
+          <a:p>
+            <a:pPr marL="1349375" lvl="2" indent="-342900">
+              <a:lnSpc>
+                <a:spcPct val="150000"/>
+              </a:lnSpc>
+              <a:buFont typeface="Wingdings" panose="05000000000000000000" pitchFamily="2" charset="2"/>
+              <a:buChar char="ü"/>
+            </a:pPr>
+            <a:endParaRPr lang="en-US" altLang="ko-KR" sz="1600" spc="-50" dirty="0"/>
+          </a:p>
+          <a:p>
+            <a:pPr marL="1349375" lvl="2" indent="-342900">
+              <a:lnSpc>
+                <a:spcPct val="150000"/>
+              </a:lnSpc>
+              <a:buFont typeface="Wingdings" panose="05000000000000000000" pitchFamily="2" charset="2"/>
+              <a:buChar char="ü"/>
+            </a:pPr>
+            <a:endParaRPr lang="en-US" altLang="ko-KR" sz="1600" spc="-50" dirty="0"/>
+          </a:p>
+          <a:p>
+            <a:pPr marL="434975" indent="-342900">
+              <a:lnSpc>
+                <a:spcPct val="150000"/>
+              </a:lnSpc>
+              <a:buFont typeface="Arial" panose="020B0604020202020204" pitchFamily="34" charset="0"/>
+              <a:buChar char="•"/>
+            </a:pPr>
+            <a:r>
+              <a:rPr lang="ko-KR" altLang="en-US" sz="1600" spc="-50" dirty="0"/>
+              <a:t>위에서 </a:t>
+            </a:r>
+            <a:r>
+              <a:rPr lang="ko-KR" altLang="en-US" sz="1600" spc="-50" dirty="0" err="1"/>
+              <a:t>처럼</a:t>
+            </a:r>
+            <a:r>
+              <a:rPr lang="ko-KR" altLang="en-US" sz="1600" spc="-50" dirty="0"/>
+              <a:t> 환경의 최적 이용을 도출하기 위해서는 두 가지 접근 법이 있다</a:t>
+            </a:r>
+            <a:r>
+              <a:rPr lang="en-US" altLang="ko-KR" sz="1600" spc="-50" dirty="0"/>
+              <a:t>.</a:t>
+            </a:r>
+          </a:p>
+          <a:p>
+            <a:pPr marL="892175" lvl="1" indent="-342900">
+              <a:lnSpc>
+                <a:spcPct val="150000"/>
+              </a:lnSpc>
+              <a:buFont typeface="Wingdings" panose="05000000000000000000" pitchFamily="2" charset="2"/>
+              <a:buChar char="ü"/>
+            </a:pPr>
+            <a:r>
+              <a:rPr lang="ko-KR" altLang="en-US" sz="1600" spc="-50" dirty="0"/>
+              <a:t>배출량 기준</a:t>
+            </a:r>
+            <a:r>
+              <a:rPr lang="en-US" altLang="ko-KR" sz="1600" spc="-50" dirty="0"/>
+              <a:t>, </a:t>
+            </a:r>
+            <a:r>
+              <a:rPr lang="ko-KR" altLang="en-US" sz="1600" spc="-50" dirty="0"/>
+              <a:t>그리고 </a:t>
+            </a:r>
+            <a:r>
+              <a:rPr lang="ko-KR" altLang="en-US" sz="1600" spc="-50" dirty="0" err="1"/>
+              <a:t>저감량</a:t>
+            </a:r>
+            <a:r>
+              <a:rPr lang="ko-KR" altLang="en-US" sz="1600" spc="-50" dirty="0"/>
+              <a:t> 기준</a:t>
+            </a:r>
+            <a:endParaRPr lang="en-US" altLang="ko-KR" sz="1600" spc="-50" dirty="0"/>
+          </a:p>
+        </p:txBody>
+      </p:sp>
+      <p:pic>
+        <p:nvPicPr>
+          <p:cNvPr id="7" name="그림 6" descr="도표, 라인, 텍스트, 그래프이(가) 표시된 사진&#10;&#10;AI 생성 콘텐츠는 정확하지 않을 수 있습니다.">
+            <a:extLst>
+              <a:ext uri="{FF2B5EF4-FFF2-40B4-BE49-F238E27FC236}">
+                <a16:creationId xmlns:a16="http://schemas.microsoft.com/office/drawing/2014/main" id="{8737ECBC-B4CE-1D92-F939-5334BD8A2DB1}"/>
+              </a:ext>
+            </a:extLst>
+          </p:cNvPr>
+          <p:cNvPicPr>
+            <a:picLocks noChangeAspect="1"/>
+          </p:cNvPicPr>
+          <p:nvPr/>
+        </p:nvPicPr>
+        <p:blipFill>
+          <a:blip r:embed="rId2"/>
+          <a:stretch>
+            <a:fillRect/>
+          </a:stretch>
+        </p:blipFill>
+        <p:spPr>
+          <a:xfrm>
+            <a:off x="4206241" y="3986467"/>
+            <a:ext cx="2227902" cy="2550440"/>
+          </a:xfrm>
+          <a:prstGeom prst="rect">
+            <a:avLst/>
+          </a:prstGeom>
+        </p:spPr>
+      </p:pic>
+      <p:pic>
+        <p:nvPicPr>
+          <p:cNvPr id="11" name="그림 10" descr="텍스트, 도표, 라인, 그래프이(가) 표시된 사진&#10;&#10;AI 생성 콘텐츠는 정확하지 않을 수 있습니다.">
+            <a:extLst>
+              <a:ext uri="{FF2B5EF4-FFF2-40B4-BE49-F238E27FC236}">
+                <a16:creationId xmlns:a16="http://schemas.microsoft.com/office/drawing/2014/main" id="{9C2CB6AF-7970-0784-439D-9A9FB0FF05CA}"/>
+              </a:ext>
+            </a:extLst>
+          </p:cNvPr>
+          <p:cNvPicPr>
+            <a:picLocks noChangeAspect="1"/>
+          </p:cNvPicPr>
+          <p:nvPr/>
+        </p:nvPicPr>
+        <p:blipFill>
+          <a:blip r:embed="rId3"/>
+          <a:stretch>
+            <a:fillRect/>
+          </a:stretch>
+        </p:blipFill>
+        <p:spPr>
+          <a:xfrm>
+            <a:off x="6397512" y="3986467"/>
+            <a:ext cx="2227902" cy="2550440"/>
+          </a:xfrm>
+          <a:prstGeom prst="rect">
+            <a:avLst/>
+          </a:prstGeom>
+        </p:spPr>
+      </p:pic>
+      <p:pic>
+        <p:nvPicPr>
+          <p:cNvPr id="6" name="그림 7" descr="Cap 2014-06-19 09-38-54-334.png">
+            <a:extLst>
+              <a:ext uri="{FF2B5EF4-FFF2-40B4-BE49-F238E27FC236}">
+                <a16:creationId xmlns:a16="http://schemas.microsoft.com/office/drawing/2014/main" id="{9A7C9AD7-EF1F-BD7C-ACA5-6BB9D9F82AF1}"/>
+              </a:ext>
+            </a:extLst>
+          </p:cNvPr>
+          <p:cNvPicPr>
+            <a:picLocks noChangeAspect="1"/>
+          </p:cNvPicPr>
+          <p:nvPr/>
+        </p:nvPicPr>
+        <p:blipFill rotWithShape="1">
+          <a:blip r:embed="rId4">
+            <a:extLst>
+              <a:ext uri="{28A0092B-C50C-407E-A947-70E740481C1C}">
+                <a14:useLocalDpi xmlns:a14="http://schemas.microsoft.com/office/drawing/2010/main" val="0"/>
+              </a:ext>
+            </a:extLst>
+          </a:blip>
+          <a:srcRect l="50785" t="20886" r="6047" b="1954"/>
+          <a:stretch>
+            <a:fillRect/>
+          </a:stretch>
+        </p:blipFill>
+        <p:spPr bwMode="auto">
+          <a:xfrm>
+            <a:off x="8826616" y="1216404"/>
+            <a:ext cx="2533475" cy="2273416"/>
+          </a:xfrm>
+          <a:prstGeom prst="rect">
+            <a:avLst/>
+          </a:prstGeom>
+          <a:noFill/>
+          <a:ln>
+            <a:noFill/>
+          </a:ln>
+          <a:extLst>
+            <a:ext uri="{909E8E84-426E-40DD-AFC4-6F175D3DCCD1}">
+              <a14:hiddenFill xmlns:a14="http://schemas.microsoft.com/office/drawing/2010/main">
+                <a:solidFill>
+                  <a:srgbClr val="FFFFFF"/>
+                </a:solidFill>
+              </a14:hiddenFill>
+            </a:ext>
+            <a:ext uri="{91240B29-F687-4F45-9708-019B960494DF}">
+              <a14:hiddenLine xmlns:a14="http://schemas.microsoft.com/office/drawing/2010/main" w="9525">
+                <a:solidFill>
+                  <a:srgbClr val="000000"/>
+                </a:solidFill>
+                <a:miter lim="800000"/>
+                <a:headEnd/>
+                <a:tailEnd/>
+              </a14:hiddenLine>
+            </a:ext>
+          </a:extLst>
+        </p:spPr>
+      </p:pic>
+      <p:sp>
+        <p:nvSpPr>
+          <p:cNvPr id="10" name="TextBox 9">
+            <a:extLst>
+              <a:ext uri="{FF2B5EF4-FFF2-40B4-BE49-F238E27FC236}">
+                <a16:creationId xmlns:a16="http://schemas.microsoft.com/office/drawing/2014/main" id="{D47807CB-C3A1-18F2-F2D4-A3B9BA218C33}"/>
+              </a:ext>
+            </a:extLst>
+          </p:cNvPr>
+          <p:cNvSpPr txBox="1"/>
+          <p:nvPr/>
+        </p:nvSpPr>
+        <p:spPr>
+          <a:xfrm>
+            <a:off x="9388622" y="859709"/>
+            <a:ext cx="1512872" cy="276999"/>
+          </a:xfrm>
+          <a:prstGeom prst="rect">
+            <a:avLst/>
+          </a:prstGeom>
+          <a:noFill/>
+        </p:spPr>
+        <p:txBody>
+          <a:bodyPr wrap="square">
+            <a:spAutoFit/>
+          </a:bodyPr>
+          <a:lstStyle/>
+          <a:p>
+            <a:pPr algn="ctr"/>
+            <a:r>
+              <a:rPr lang="en-US" altLang="ko-KR" sz="1200" spc="-50" dirty="0"/>
+              <a:t>&lt;</a:t>
+            </a:r>
+            <a:r>
+              <a:rPr lang="ko-KR" altLang="en-US" sz="1200" spc="-50" dirty="0"/>
+              <a:t>최적 </a:t>
+            </a:r>
+            <a:r>
+              <a:rPr lang="ko-KR" altLang="en-US" sz="1200" spc="-50" dirty="0" err="1"/>
+              <a:t>저감량</a:t>
+            </a:r>
+            <a:r>
+              <a:rPr lang="en-US" altLang="ko-KR" sz="1200" spc="-50" dirty="0"/>
+              <a:t>&gt;</a:t>
+            </a:r>
+            <a:endParaRPr lang="ko-KR" altLang="en-US" sz="1400" dirty="0"/>
+          </a:p>
+        </p:txBody>
+      </p:sp>
+    </p:spTree>
+    <p:extLst>
+      <p:ext uri="{BB962C8B-B14F-4D97-AF65-F5344CB8AC3E}">
+        <p14:creationId xmlns:p14="http://schemas.microsoft.com/office/powerpoint/2010/main" val="4280919478"/>
+      </p:ext>
+    </p:extLst>
+  </p:cSld>
+  <p:clrMapOvr>
+    <a:masterClrMapping/>
+  </p:clrMapOvr>
+</p:sld>
+</file>
+
+<file path=ppt/slides/slide13.xml><?xml version="1.0" encoding="utf-8"?>
+<p:sld xmlns:a="http://schemas.openxmlformats.org/drawingml/2006/main" xmlns:r="http://schemas.openxmlformats.org/officeDocument/2006/relationships" xmlns:p="http://schemas.openxmlformats.org/presentationml/2006/main">
+  <p:cSld>
+    <p:spTree>
+      <p:nvGrpSpPr>
+        <p:cNvPr id="1" name="">
+          <a:extLst>
+            <a:ext uri="{FF2B5EF4-FFF2-40B4-BE49-F238E27FC236}">
               <a16:creationId xmlns:a16="http://schemas.microsoft.com/office/drawing/2014/main" id="{23B8A6F3-CB0F-7C79-09A1-C932D40DFE95}"/>
             </a:ext>
           </a:extLst>
@@ -7644,7 +8562,7 @@
           <a:p>
             <a:fld id="{109C872D-39A9-4065-8BF3-6A613116E2A1}" type="slidenum">
               <a:rPr lang="ko-KR" altLang="en-US" smtClean="0"/>
-              <a:t>11</a:t>
+              <a:t>13</a:t>
             </a:fld>
             <a:endParaRPr lang="ko-KR" altLang="en-US"/>
           </a:p>
@@ -9333,924 +10251,6 @@
 </p:sld>
 </file>
 
-<file path=ppt/slides/slide12.xml><?xml version="1.0" encoding="utf-8"?>
-<p:sld xmlns:a="http://schemas.openxmlformats.org/drawingml/2006/main" xmlns:r="http://schemas.openxmlformats.org/officeDocument/2006/relationships" xmlns:p="http://schemas.openxmlformats.org/presentationml/2006/main">
-  <p:cSld>
-    <p:spTree>
-      <p:nvGrpSpPr>
-        <p:cNvPr id="1" name="">
-          <a:extLst>
-            <a:ext uri="{FF2B5EF4-FFF2-40B4-BE49-F238E27FC236}">
-              <a16:creationId xmlns:a16="http://schemas.microsoft.com/office/drawing/2014/main" id="{26D3AAE5-A43F-B994-1553-352CADF86A87}"/>
-            </a:ext>
-          </a:extLst>
-        </p:cNvPr>
-        <p:cNvGrpSpPr/>
-        <p:nvPr/>
-      </p:nvGrpSpPr>
-      <p:grpSpPr>
-        <a:xfrm>
-          <a:off x="0" y="0"/>
-          <a:ext cx="0" cy="0"/>
-          <a:chOff x="0" y="0"/>
-          <a:chExt cx="0" cy="0"/>
-        </a:xfrm>
-      </p:grpSpPr>
-      <p:sp>
-        <p:nvSpPr>
-          <p:cNvPr id="2" name="제목 1">
-            <a:extLst>
-              <a:ext uri="{FF2B5EF4-FFF2-40B4-BE49-F238E27FC236}">
-                <a16:creationId xmlns:a16="http://schemas.microsoft.com/office/drawing/2014/main" id="{80D1BE3A-1C12-EDB1-6788-6D19F161A620}"/>
-              </a:ext>
-            </a:extLst>
-          </p:cNvPr>
-          <p:cNvSpPr>
-            <a:spLocks noGrp="1"/>
-          </p:cNvSpPr>
-          <p:nvPr>
-            <p:ph type="title"/>
-          </p:nvPr>
-        </p:nvSpPr>
-        <p:spPr/>
-        <p:txBody>
-          <a:bodyPr/>
-          <a:lstStyle/>
-          <a:p>
-            <a:r>
-              <a:rPr lang="ko-KR" altLang="en-US" dirty="0"/>
-              <a:t>환경의 최적이용</a:t>
-            </a:r>
-          </a:p>
-        </p:txBody>
-      </p:sp>
-      <p:sp>
-        <p:nvSpPr>
-          <p:cNvPr id="4" name="슬라이드 번호 개체 틀 3">
-            <a:extLst>
-              <a:ext uri="{FF2B5EF4-FFF2-40B4-BE49-F238E27FC236}">
-                <a16:creationId xmlns:a16="http://schemas.microsoft.com/office/drawing/2014/main" id="{3167FF99-30D2-1BC7-EF15-91D166E6645A}"/>
-              </a:ext>
-            </a:extLst>
-          </p:cNvPr>
-          <p:cNvSpPr>
-            <a:spLocks noGrp="1"/>
-          </p:cNvSpPr>
-          <p:nvPr>
-            <p:ph type="sldNum" sz="quarter" idx="12"/>
-          </p:nvPr>
-        </p:nvSpPr>
-        <p:spPr/>
-        <p:txBody>
-          <a:bodyPr/>
-          <a:lstStyle/>
-          <a:p>
-            <a:fld id="{109C872D-39A9-4065-8BF3-6A613116E2A1}" type="slidenum">
-              <a:rPr lang="ko-KR" altLang="en-US" smtClean="0"/>
-              <a:t>12</a:t>
-            </a:fld>
-            <a:endParaRPr lang="ko-KR" altLang="en-US"/>
-          </a:p>
-        </p:txBody>
-      </p:sp>
-      <p:sp>
-        <p:nvSpPr>
-          <p:cNvPr id="8" name="TextBox 7">
-            <a:extLst>
-              <a:ext uri="{FF2B5EF4-FFF2-40B4-BE49-F238E27FC236}">
-                <a16:creationId xmlns:a16="http://schemas.microsoft.com/office/drawing/2014/main" id="{0228059C-AF28-EB58-B45A-3367E2D098C6}"/>
-              </a:ext>
-            </a:extLst>
-          </p:cNvPr>
-          <p:cNvSpPr txBox="1"/>
-          <p:nvPr/>
-        </p:nvSpPr>
-        <p:spPr>
-          <a:xfrm>
-            <a:off x="288790" y="787394"/>
-            <a:ext cx="11414260" cy="1522020"/>
-          </a:xfrm>
-          <a:prstGeom prst="rect">
-            <a:avLst/>
-          </a:prstGeom>
-          <a:noFill/>
-        </p:spPr>
-        <p:txBody>
-          <a:bodyPr wrap="square" rtlCol="0" anchor="t">
-            <a:spAutoFit/>
-          </a:bodyPr>
-          <a:lstStyle/>
-          <a:p>
-            <a:pPr marL="377825" indent="-285750">
-              <a:lnSpc>
-                <a:spcPct val="150000"/>
-              </a:lnSpc>
-              <a:buFont typeface="Arial" panose="020B0604020202020204" pitchFamily="34" charset="0"/>
-              <a:buChar char="•"/>
-            </a:pPr>
-            <a:r>
-              <a:rPr lang="ko-KR" altLang="en-US" sz="1600" spc="-50" dirty="0"/>
-              <a:t>앞서 설명한 환경정책의 편익과 비용을 나타내는 개념들을 이용하여 사회적으로 바람직한 수준의 오염물질 배출량 혹은 </a:t>
-            </a:r>
-            <a:r>
-              <a:rPr lang="ko-KR" altLang="en-US" sz="1600" spc="-50" dirty="0" err="1"/>
-              <a:t>저감량을</a:t>
-            </a:r>
-            <a:r>
-              <a:rPr lang="ko-KR" altLang="en-US" sz="1600" spc="-50" dirty="0"/>
-              <a:t> 도출할 수 있다</a:t>
-            </a:r>
-            <a:r>
-              <a:rPr lang="en-US" altLang="ko-KR" sz="1600" spc="-50" dirty="0"/>
-              <a:t>.</a:t>
-            </a:r>
-          </a:p>
-          <a:p>
-            <a:pPr marL="892175" lvl="1" indent="-342900">
-              <a:lnSpc>
-                <a:spcPct val="150000"/>
-              </a:lnSpc>
-              <a:buFont typeface="+mj-lt"/>
-              <a:buAutoNum type="arabicPeriod"/>
-            </a:pPr>
-            <a:r>
-              <a:rPr lang="ko-KR" altLang="en-US" sz="1600" spc="-50" dirty="0"/>
-              <a:t>배출량을 기준으로 하는 경우</a:t>
-            </a:r>
-            <a:r>
-              <a:rPr lang="en-US" altLang="ko-KR" sz="1600" spc="-50" dirty="0"/>
-              <a:t>, </a:t>
-            </a:r>
-            <a:r>
-              <a:rPr lang="ko-KR" altLang="en-US" sz="1600" spc="-50" dirty="0"/>
-              <a:t>최적 배출량은 오염물질 배출로 인한 한계오염피해와 오염물질 배출을 한 단위 줄이는데 소요되는 한계저감비용이 같게 되는 배출량이다</a:t>
-            </a:r>
-            <a:r>
-              <a:rPr lang="en-US" altLang="ko-KR" sz="1600" spc="-50" dirty="0"/>
-              <a:t>.</a:t>
-            </a:r>
-          </a:p>
-        </p:txBody>
-      </p:sp>
-      <p:sp>
-        <p:nvSpPr>
-          <p:cNvPr id="12" name="TextBox 11">
-            <a:extLst>
-              <a:ext uri="{FF2B5EF4-FFF2-40B4-BE49-F238E27FC236}">
-                <a16:creationId xmlns:a16="http://schemas.microsoft.com/office/drawing/2014/main" id="{C16C825C-BF92-F0E1-0A47-00174D9701F1}"/>
-              </a:ext>
-            </a:extLst>
-          </p:cNvPr>
-          <p:cNvSpPr txBox="1"/>
-          <p:nvPr/>
-        </p:nvSpPr>
-        <p:spPr>
-          <a:xfrm>
-            <a:off x="288790" y="2335170"/>
-            <a:ext cx="7948430" cy="2630015"/>
-          </a:xfrm>
-          <a:prstGeom prst="rect">
-            <a:avLst/>
-          </a:prstGeom>
-          <a:noFill/>
-        </p:spPr>
-        <p:txBody>
-          <a:bodyPr wrap="square" rtlCol="0" anchor="t">
-            <a:spAutoFit/>
-          </a:bodyPr>
-          <a:lstStyle/>
-          <a:p>
-            <a:pPr marL="1349375" lvl="2" indent="-342900">
-              <a:lnSpc>
-                <a:spcPct val="150000"/>
-              </a:lnSpc>
-              <a:buFont typeface="Wingdings" panose="05000000000000000000" pitchFamily="2" charset="2"/>
-              <a:buChar char="ü"/>
-            </a:pPr>
-            <a:r>
-              <a:rPr lang="ko-KR" altLang="en-US" sz="1600" spc="-50" dirty="0"/>
-              <a:t>아래 그림에서 최적 배출량은 </a:t>
-            </a:r>
-            <a:r>
-              <a:rPr lang="en-US" altLang="ko-KR" sz="1600" spc="-50" dirty="0"/>
-              <a:t>e*</a:t>
-            </a:r>
-            <a:r>
-              <a:rPr lang="ko-KR" altLang="en-US" sz="1600" spc="-50" dirty="0"/>
-              <a:t>로</a:t>
-            </a:r>
-            <a:r>
-              <a:rPr lang="en-US" altLang="ko-KR" sz="1600" spc="-50" dirty="0"/>
-              <a:t> </a:t>
-            </a:r>
-            <a:r>
-              <a:rPr lang="ko-KR" altLang="en-US" sz="1600" spc="-50" dirty="0"/>
-              <a:t>표시되어 있다</a:t>
-            </a:r>
-            <a:r>
-              <a:rPr lang="en-US" altLang="ko-KR" sz="1600" spc="-50" dirty="0"/>
-              <a:t>.</a:t>
-            </a:r>
-          </a:p>
-          <a:p>
-            <a:pPr marL="1349375" lvl="2" indent="-342900">
-              <a:lnSpc>
-                <a:spcPct val="150000"/>
-              </a:lnSpc>
-              <a:buFont typeface="Wingdings" panose="05000000000000000000" pitchFamily="2" charset="2"/>
-              <a:buChar char="ü"/>
-            </a:pPr>
-            <a:r>
-              <a:rPr lang="ko-KR" altLang="en-US" sz="1600" spc="-50" dirty="0"/>
-              <a:t>현재 배출량이 </a:t>
-            </a:r>
-            <a:r>
-              <a:rPr lang="en-US" altLang="ko-KR" sz="1600" spc="-50" dirty="0"/>
-              <a:t>e* </a:t>
-            </a:r>
-            <a:r>
-              <a:rPr lang="ko-KR" altLang="en-US" sz="1600" spc="-50" dirty="0"/>
-              <a:t>보다 크다면 한 단위의 배출감소로 인한 오염피해 감소분이 저감비용보다 크기 때문에</a:t>
-            </a:r>
-            <a:r>
-              <a:rPr lang="en-US" altLang="ko-KR" sz="1600" spc="-50" dirty="0"/>
-              <a:t>, </a:t>
-            </a:r>
-            <a:r>
-              <a:rPr lang="ko-KR" altLang="en-US" sz="1600" spc="-50" dirty="0"/>
-              <a:t>배출량을 줄여야 사회 전체 순편익이 늘어난다</a:t>
-            </a:r>
-            <a:r>
-              <a:rPr lang="en-US" altLang="ko-KR" sz="1600" spc="-50" dirty="0"/>
-              <a:t>.</a:t>
-            </a:r>
-          </a:p>
-          <a:p>
-            <a:pPr marL="1349375" lvl="2" indent="-342900">
-              <a:lnSpc>
-                <a:spcPct val="150000"/>
-              </a:lnSpc>
-              <a:buFont typeface="Wingdings" panose="05000000000000000000" pitchFamily="2" charset="2"/>
-              <a:buChar char="ü"/>
-            </a:pPr>
-            <a:r>
-              <a:rPr lang="ko-KR" altLang="en-US" sz="1600" spc="-50" dirty="0"/>
-              <a:t>반대로</a:t>
-            </a:r>
-            <a:r>
-              <a:rPr lang="en-US" altLang="ko-KR" sz="1600" spc="-50" dirty="0"/>
-              <a:t>, </a:t>
-            </a:r>
-            <a:r>
-              <a:rPr lang="ko-KR" altLang="en-US" sz="1600" spc="-50" dirty="0"/>
-              <a:t>현재 배출량이 </a:t>
-            </a:r>
-            <a:r>
-              <a:rPr lang="en-US" altLang="ko-KR" sz="1600" spc="-50" dirty="0"/>
-              <a:t>e*</a:t>
-            </a:r>
-            <a:r>
-              <a:rPr lang="ko-KR" altLang="en-US" sz="1600" spc="-50" dirty="0"/>
-              <a:t>보다</a:t>
-            </a:r>
-            <a:r>
-              <a:rPr lang="en-US" altLang="ko-KR" sz="1600" spc="-50" dirty="0"/>
-              <a:t> </a:t>
-            </a:r>
-            <a:r>
-              <a:rPr lang="ko-KR" altLang="en-US" sz="1600" spc="-50" dirty="0"/>
-              <a:t>작다면 배출을 늘리면서 절약되는 저감비용이 그 때문에 늘어나는 피해액보다 더 크기 때문에</a:t>
-            </a:r>
-            <a:r>
-              <a:rPr lang="en-US" altLang="ko-KR" sz="1600" spc="-50" dirty="0"/>
-              <a:t>, </a:t>
-            </a:r>
-            <a:r>
-              <a:rPr lang="ko-KR" altLang="en-US" sz="1600" spc="-50" dirty="0"/>
-              <a:t>배출량을 늘려야 사회 전체 순편익이 늘어난다</a:t>
-            </a:r>
-            <a:r>
-              <a:rPr lang="en-US" altLang="ko-KR" sz="1600" spc="-50" dirty="0"/>
-              <a:t>.</a:t>
-            </a:r>
-          </a:p>
-        </p:txBody>
-      </p:sp>
-      <p:pic>
-        <p:nvPicPr>
-          <p:cNvPr id="5" name="그림 7" descr="Cap 2014-06-19 09-38-54-334.png">
-            <a:extLst>
-              <a:ext uri="{FF2B5EF4-FFF2-40B4-BE49-F238E27FC236}">
-                <a16:creationId xmlns:a16="http://schemas.microsoft.com/office/drawing/2014/main" id="{BEB4EBA8-249E-4DE3-10BD-262D86CA76A4}"/>
-              </a:ext>
-            </a:extLst>
-          </p:cNvPr>
-          <p:cNvPicPr>
-            <a:picLocks noChangeAspect="1"/>
-          </p:cNvPicPr>
-          <p:nvPr/>
-        </p:nvPicPr>
-        <p:blipFill rotWithShape="1">
-          <a:blip r:embed="rId2">
-            <a:extLst>
-              <a:ext uri="{28A0092B-C50C-407E-A947-70E740481C1C}">
-                <a14:useLocalDpi xmlns:a14="http://schemas.microsoft.com/office/drawing/2010/main" val="0"/>
-              </a:ext>
-            </a:extLst>
-          </a:blip>
-          <a:srcRect l="6045" t="19463" r="50501"/>
-          <a:stretch>
-            <a:fillRect/>
-          </a:stretch>
-        </p:blipFill>
-        <p:spPr bwMode="auto">
-          <a:xfrm>
-            <a:off x="8531604" y="3473042"/>
-            <a:ext cx="2550254" cy="2372948"/>
-          </a:xfrm>
-          <a:prstGeom prst="rect">
-            <a:avLst/>
-          </a:prstGeom>
-          <a:noFill/>
-          <a:ln>
-            <a:noFill/>
-          </a:ln>
-          <a:extLst>
-            <a:ext uri="{909E8E84-426E-40DD-AFC4-6F175D3DCCD1}">
-              <a14:hiddenFill xmlns:a14="http://schemas.microsoft.com/office/drawing/2010/main">
-                <a:solidFill>
-                  <a:srgbClr val="FFFFFF"/>
-                </a:solidFill>
-              </a14:hiddenFill>
-            </a:ext>
-            <a:ext uri="{91240B29-F687-4F45-9708-019B960494DF}">
-              <a14:hiddenLine xmlns:a14="http://schemas.microsoft.com/office/drawing/2010/main" w="9525">
-                <a:solidFill>
-                  <a:srgbClr val="000000"/>
-                </a:solidFill>
-                <a:miter lim="800000"/>
-                <a:headEnd/>
-                <a:tailEnd/>
-              </a14:hiddenLine>
-            </a:ext>
-          </a:extLst>
-        </p:spPr>
-      </p:pic>
-      <p:sp>
-        <p:nvSpPr>
-          <p:cNvPr id="7" name="TextBox 6">
-            <a:extLst>
-              <a:ext uri="{FF2B5EF4-FFF2-40B4-BE49-F238E27FC236}">
-                <a16:creationId xmlns:a16="http://schemas.microsoft.com/office/drawing/2014/main" id="{51A80B09-F268-A6FD-7BC9-1C54CCBEB68E}"/>
-              </a:ext>
-            </a:extLst>
-          </p:cNvPr>
-          <p:cNvSpPr txBox="1"/>
-          <p:nvPr/>
-        </p:nvSpPr>
-        <p:spPr>
-          <a:xfrm>
-            <a:off x="9141146" y="3107959"/>
-            <a:ext cx="1512872" cy="276999"/>
-          </a:xfrm>
-          <a:prstGeom prst="rect">
-            <a:avLst/>
-          </a:prstGeom>
-          <a:noFill/>
-        </p:spPr>
-        <p:txBody>
-          <a:bodyPr wrap="square">
-            <a:spAutoFit/>
-          </a:bodyPr>
-          <a:lstStyle/>
-          <a:p>
-            <a:pPr algn="ctr"/>
-            <a:r>
-              <a:rPr lang="en-US" altLang="ko-KR" sz="1200" spc="-50" dirty="0"/>
-              <a:t>&lt;</a:t>
-            </a:r>
-            <a:r>
-              <a:rPr lang="ko-KR" altLang="en-US" sz="1200" spc="-50" dirty="0"/>
-              <a:t>최적 배출량</a:t>
-            </a:r>
-            <a:r>
-              <a:rPr lang="en-US" altLang="ko-KR" sz="1200" spc="-50" dirty="0"/>
-              <a:t>&gt;</a:t>
-            </a:r>
-            <a:endParaRPr lang="ko-KR" altLang="en-US" sz="1400" dirty="0"/>
-          </a:p>
-        </p:txBody>
-      </p:sp>
-    </p:spTree>
-    <p:extLst>
-      <p:ext uri="{BB962C8B-B14F-4D97-AF65-F5344CB8AC3E}">
-        <p14:creationId xmlns:p14="http://schemas.microsoft.com/office/powerpoint/2010/main" val="1261661617"/>
-      </p:ext>
-    </p:extLst>
-  </p:cSld>
-  <p:clrMapOvr>
-    <a:masterClrMapping/>
-  </p:clrMapOvr>
-</p:sld>
-</file>
-
-<file path=ppt/slides/slide13.xml><?xml version="1.0" encoding="utf-8"?>
-<p:sld xmlns:a="http://schemas.openxmlformats.org/drawingml/2006/main" xmlns:r="http://schemas.openxmlformats.org/officeDocument/2006/relationships" xmlns:p="http://schemas.openxmlformats.org/presentationml/2006/main">
-  <p:cSld>
-    <p:spTree>
-      <p:nvGrpSpPr>
-        <p:cNvPr id="1" name="">
-          <a:extLst>
-            <a:ext uri="{FF2B5EF4-FFF2-40B4-BE49-F238E27FC236}">
-              <a16:creationId xmlns:a16="http://schemas.microsoft.com/office/drawing/2014/main" id="{0527CDE9-8B56-EE43-13A1-99E9AE5317EF}"/>
-            </a:ext>
-          </a:extLst>
-        </p:cNvPr>
-        <p:cNvGrpSpPr/>
-        <p:nvPr/>
-      </p:nvGrpSpPr>
-      <p:grpSpPr>
-        <a:xfrm>
-          <a:off x="0" y="0"/>
-          <a:ext cx="0" cy="0"/>
-          <a:chOff x="0" y="0"/>
-          <a:chExt cx="0" cy="0"/>
-        </a:xfrm>
-      </p:grpSpPr>
-      <p:sp>
-        <p:nvSpPr>
-          <p:cNvPr id="2" name="제목 1">
-            <a:extLst>
-              <a:ext uri="{FF2B5EF4-FFF2-40B4-BE49-F238E27FC236}">
-                <a16:creationId xmlns:a16="http://schemas.microsoft.com/office/drawing/2014/main" id="{B8471791-42AE-F261-5B13-9E2F56E461F4}"/>
-              </a:ext>
-            </a:extLst>
-          </p:cNvPr>
-          <p:cNvSpPr>
-            <a:spLocks noGrp="1"/>
-          </p:cNvSpPr>
-          <p:nvPr>
-            <p:ph type="title"/>
-          </p:nvPr>
-        </p:nvSpPr>
-        <p:spPr/>
-        <p:txBody>
-          <a:bodyPr/>
-          <a:lstStyle/>
-          <a:p>
-            <a:r>
-              <a:rPr lang="ko-KR" altLang="en-US" dirty="0"/>
-              <a:t>환경의 최적이용</a:t>
-            </a:r>
-          </a:p>
-        </p:txBody>
-      </p:sp>
-      <p:sp>
-        <p:nvSpPr>
-          <p:cNvPr id="4" name="슬라이드 번호 개체 틀 3">
-            <a:extLst>
-              <a:ext uri="{FF2B5EF4-FFF2-40B4-BE49-F238E27FC236}">
-                <a16:creationId xmlns:a16="http://schemas.microsoft.com/office/drawing/2014/main" id="{1363A50E-DB0D-B55E-1CEE-C3DA3B6BDE0A}"/>
-              </a:ext>
-            </a:extLst>
-          </p:cNvPr>
-          <p:cNvSpPr>
-            <a:spLocks noGrp="1"/>
-          </p:cNvSpPr>
-          <p:nvPr>
-            <p:ph type="sldNum" sz="quarter" idx="12"/>
-          </p:nvPr>
-        </p:nvSpPr>
-        <p:spPr/>
-        <p:txBody>
-          <a:bodyPr/>
-          <a:lstStyle/>
-          <a:p>
-            <a:fld id="{109C872D-39A9-4065-8BF3-6A613116E2A1}" type="slidenum">
-              <a:rPr lang="ko-KR" altLang="en-US" smtClean="0"/>
-              <a:t>13</a:t>
-            </a:fld>
-            <a:endParaRPr lang="ko-KR" altLang="en-US"/>
-          </a:p>
-        </p:txBody>
-      </p:sp>
-      <p:sp>
-        <p:nvSpPr>
-          <p:cNvPr id="8" name="TextBox 7">
-            <a:extLst>
-              <a:ext uri="{FF2B5EF4-FFF2-40B4-BE49-F238E27FC236}">
-                <a16:creationId xmlns:a16="http://schemas.microsoft.com/office/drawing/2014/main" id="{E54A0A24-1940-4F60-9CF9-763BF238581D}"/>
-              </a:ext>
-            </a:extLst>
-          </p:cNvPr>
-          <p:cNvSpPr txBox="1"/>
-          <p:nvPr/>
-        </p:nvSpPr>
-        <p:spPr>
-          <a:xfrm>
-            <a:off x="288790" y="787394"/>
-            <a:ext cx="7948430" cy="783356"/>
-          </a:xfrm>
-          <a:prstGeom prst="rect">
-            <a:avLst/>
-          </a:prstGeom>
-          <a:noFill/>
-        </p:spPr>
-        <p:txBody>
-          <a:bodyPr wrap="square" rtlCol="0" anchor="t">
-            <a:spAutoFit/>
-          </a:bodyPr>
-          <a:lstStyle/>
-          <a:p>
-            <a:pPr marL="892175" lvl="1" indent="-342900">
-              <a:lnSpc>
-                <a:spcPct val="150000"/>
-              </a:lnSpc>
-              <a:buFont typeface="+mj-lt"/>
-              <a:buAutoNum type="arabicPeriod" startAt="2"/>
-            </a:pPr>
-            <a:r>
-              <a:rPr lang="ko-KR" altLang="en-US" sz="1600" spc="-50" dirty="0" err="1"/>
-              <a:t>저감량을</a:t>
-            </a:r>
-            <a:r>
-              <a:rPr lang="ko-KR" altLang="en-US" sz="1600" spc="-50" dirty="0"/>
-              <a:t> 기준으로 하는 경우</a:t>
-            </a:r>
-            <a:r>
-              <a:rPr lang="en-US" altLang="ko-KR" sz="1600" spc="-50" dirty="0"/>
-              <a:t>, </a:t>
-            </a:r>
-            <a:r>
-              <a:rPr lang="ko-KR" altLang="en-US" sz="1600" spc="-50" dirty="0"/>
-              <a:t>최적 </a:t>
-            </a:r>
-            <a:r>
-              <a:rPr lang="ko-KR" altLang="en-US" sz="1600" spc="-50" dirty="0" err="1"/>
-              <a:t>저감량은</a:t>
-            </a:r>
-            <a:r>
-              <a:rPr lang="ko-KR" altLang="en-US" sz="1600" spc="-50" dirty="0"/>
-              <a:t> 저감의 한계편익과 한계저감비용이 일치하는 수준에서 결정된다</a:t>
-            </a:r>
-            <a:r>
-              <a:rPr lang="en-US" altLang="ko-KR" sz="1600" spc="-50" dirty="0"/>
-              <a:t>.</a:t>
-            </a:r>
-          </a:p>
-        </p:txBody>
-      </p:sp>
-      <p:sp>
-        <p:nvSpPr>
-          <p:cNvPr id="12" name="TextBox 11">
-            <a:extLst>
-              <a:ext uri="{FF2B5EF4-FFF2-40B4-BE49-F238E27FC236}">
-                <a16:creationId xmlns:a16="http://schemas.microsoft.com/office/drawing/2014/main" id="{3E5ED435-A941-3548-7350-8B0F2943F033}"/>
-              </a:ext>
-            </a:extLst>
-          </p:cNvPr>
-          <p:cNvSpPr txBox="1"/>
-          <p:nvPr/>
-        </p:nvSpPr>
-        <p:spPr>
-          <a:xfrm>
-            <a:off x="288790" y="1603650"/>
-            <a:ext cx="7948430" cy="2630015"/>
-          </a:xfrm>
-          <a:prstGeom prst="rect">
-            <a:avLst/>
-          </a:prstGeom>
-          <a:noFill/>
-        </p:spPr>
-        <p:txBody>
-          <a:bodyPr wrap="square" rtlCol="0" anchor="t">
-            <a:spAutoFit/>
-          </a:bodyPr>
-          <a:lstStyle/>
-          <a:p>
-            <a:pPr marL="1349375" lvl="2" indent="-342900">
-              <a:lnSpc>
-                <a:spcPct val="150000"/>
-              </a:lnSpc>
-              <a:buFont typeface="Wingdings" panose="05000000000000000000" pitchFamily="2" charset="2"/>
-              <a:buChar char="ü"/>
-            </a:pPr>
-            <a:r>
-              <a:rPr lang="ko-KR" altLang="en-US" sz="1600" spc="-50"/>
-              <a:t>오른쪽 </a:t>
-            </a:r>
-            <a:r>
-              <a:rPr lang="ko-KR" altLang="en-US" sz="1600" spc="-50" dirty="0"/>
-              <a:t>그림에서 최적 </a:t>
-            </a:r>
-            <a:r>
-              <a:rPr lang="ko-KR" altLang="en-US" sz="1600" spc="-50" dirty="0" err="1"/>
-              <a:t>저감량은</a:t>
-            </a:r>
-            <a:r>
-              <a:rPr lang="ko-KR" altLang="en-US" sz="1600" spc="-50" dirty="0"/>
-              <a:t> </a:t>
-            </a:r>
-            <a:r>
-              <a:rPr lang="en-US" altLang="ko-KR" sz="1600" spc="-50" dirty="0"/>
-              <a:t>a*</a:t>
-            </a:r>
-            <a:r>
-              <a:rPr lang="ko-KR" altLang="en-US" sz="1600" spc="-50" dirty="0"/>
-              <a:t>로</a:t>
-            </a:r>
-            <a:r>
-              <a:rPr lang="en-US" altLang="ko-KR" sz="1600" spc="-50" dirty="0"/>
-              <a:t> </a:t>
-            </a:r>
-            <a:r>
-              <a:rPr lang="ko-KR" altLang="en-US" sz="1600" spc="-50" dirty="0"/>
-              <a:t>표시되어 있다</a:t>
-            </a:r>
-            <a:r>
-              <a:rPr lang="en-US" altLang="ko-KR" sz="1600" spc="-50" dirty="0"/>
-              <a:t>.</a:t>
-            </a:r>
-          </a:p>
-          <a:p>
-            <a:pPr marL="1349375" lvl="2" indent="-342900">
-              <a:lnSpc>
-                <a:spcPct val="150000"/>
-              </a:lnSpc>
-              <a:buFont typeface="Wingdings" panose="05000000000000000000" pitchFamily="2" charset="2"/>
-              <a:buChar char="ü"/>
-            </a:pPr>
-            <a:endParaRPr lang="en-US" altLang="ko-KR" sz="1600" spc="-50" dirty="0"/>
-          </a:p>
-          <a:p>
-            <a:pPr marL="1349375" lvl="2" indent="-342900">
-              <a:lnSpc>
-                <a:spcPct val="150000"/>
-              </a:lnSpc>
-              <a:buFont typeface="Wingdings" panose="05000000000000000000" pitchFamily="2" charset="2"/>
-              <a:buChar char="ü"/>
-            </a:pPr>
-            <a:endParaRPr lang="en-US" altLang="ko-KR" sz="1600" spc="-50" dirty="0"/>
-          </a:p>
-          <a:p>
-            <a:pPr marL="1349375" lvl="2" indent="-342900">
-              <a:lnSpc>
-                <a:spcPct val="150000"/>
-              </a:lnSpc>
-              <a:buFont typeface="Wingdings" panose="05000000000000000000" pitchFamily="2" charset="2"/>
-              <a:buChar char="ü"/>
-            </a:pPr>
-            <a:endParaRPr lang="en-US" altLang="ko-KR" sz="1600" spc="-50" dirty="0"/>
-          </a:p>
-          <a:p>
-            <a:pPr marL="1349375" lvl="2" indent="-342900">
-              <a:lnSpc>
-                <a:spcPct val="150000"/>
-              </a:lnSpc>
-              <a:buFont typeface="Wingdings" panose="05000000000000000000" pitchFamily="2" charset="2"/>
-              <a:buChar char="ü"/>
-            </a:pPr>
-            <a:endParaRPr lang="en-US" altLang="ko-KR" sz="1600" spc="-50" dirty="0"/>
-          </a:p>
-          <a:p>
-            <a:pPr marL="434975" indent="-342900">
-              <a:lnSpc>
-                <a:spcPct val="150000"/>
-              </a:lnSpc>
-              <a:buFont typeface="Arial" panose="020B0604020202020204" pitchFamily="34" charset="0"/>
-              <a:buChar char="•"/>
-            </a:pPr>
-            <a:r>
-              <a:rPr lang="ko-KR" altLang="en-US" sz="1600" spc="-50" dirty="0"/>
-              <a:t>위에서 </a:t>
-            </a:r>
-            <a:r>
-              <a:rPr lang="ko-KR" altLang="en-US" sz="1600" spc="-50" dirty="0" err="1"/>
-              <a:t>처럼</a:t>
-            </a:r>
-            <a:r>
-              <a:rPr lang="ko-KR" altLang="en-US" sz="1600" spc="-50" dirty="0"/>
-              <a:t> 환경의 최적 이용을 도출하기 위해서는 두 가지 접근 법이 있다</a:t>
-            </a:r>
-            <a:r>
-              <a:rPr lang="en-US" altLang="ko-KR" sz="1600" spc="-50" dirty="0"/>
-              <a:t>.</a:t>
-            </a:r>
-          </a:p>
-          <a:p>
-            <a:pPr marL="892175" lvl="1" indent="-342900">
-              <a:lnSpc>
-                <a:spcPct val="150000"/>
-              </a:lnSpc>
-              <a:buFont typeface="Wingdings" panose="05000000000000000000" pitchFamily="2" charset="2"/>
-              <a:buChar char="ü"/>
-            </a:pPr>
-            <a:r>
-              <a:rPr lang="ko-KR" altLang="en-US" sz="1600" spc="-50" dirty="0"/>
-              <a:t>배출량 기준</a:t>
-            </a:r>
-            <a:r>
-              <a:rPr lang="en-US" altLang="ko-KR" sz="1600" spc="-50" dirty="0"/>
-              <a:t>, </a:t>
-            </a:r>
-            <a:r>
-              <a:rPr lang="ko-KR" altLang="en-US" sz="1600" spc="-50" dirty="0"/>
-              <a:t>그리고 </a:t>
-            </a:r>
-            <a:r>
-              <a:rPr lang="ko-KR" altLang="en-US" sz="1600" spc="-50" dirty="0" err="1"/>
-              <a:t>저감량</a:t>
-            </a:r>
-            <a:r>
-              <a:rPr lang="ko-KR" altLang="en-US" sz="1600" spc="-50" dirty="0"/>
-              <a:t> 기준</a:t>
-            </a:r>
-            <a:endParaRPr lang="en-US" altLang="ko-KR" sz="1600" spc="-50" dirty="0"/>
-          </a:p>
-        </p:txBody>
-      </p:sp>
-      <p:pic>
-        <p:nvPicPr>
-          <p:cNvPr id="7" name="그림 6" descr="도표, 라인, 텍스트, 그래프이(가) 표시된 사진&#10;&#10;AI 생성 콘텐츠는 정확하지 않을 수 있습니다.">
-            <a:extLst>
-              <a:ext uri="{FF2B5EF4-FFF2-40B4-BE49-F238E27FC236}">
-                <a16:creationId xmlns:a16="http://schemas.microsoft.com/office/drawing/2014/main" id="{8737ECBC-B4CE-1D92-F939-5334BD8A2DB1}"/>
-              </a:ext>
-            </a:extLst>
-          </p:cNvPr>
-          <p:cNvPicPr>
-            <a:picLocks noChangeAspect="1"/>
-          </p:cNvPicPr>
-          <p:nvPr/>
-        </p:nvPicPr>
-        <p:blipFill>
-          <a:blip r:embed="rId2"/>
-          <a:stretch>
-            <a:fillRect/>
-          </a:stretch>
-        </p:blipFill>
-        <p:spPr>
-          <a:xfrm>
-            <a:off x="4206241" y="3986467"/>
-            <a:ext cx="2227902" cy="2550440"/>
-          </a:xfrm>
-          <a:prstGeom prst="rect">
-            <a:avLst/>
-          </a:prstGeom>
-        </p:spPr>
-      </p:pic>
-      <p:pic>
-        <p:nvPicPr>
-          <p:cNvPr id="11" name="그림 10" descr="텍스트, 도표, 라인, 그래프이(가) 표시된 사진&#10;&#10;AI 생성 콘텐츠는 정확하지 않을 수 있습니다.">
-            <a:extLst>
-              <a:ext uri="{FF2B5EF4-FFF2-40B4-BE49-F238E27FC236}">
-                <a16:creationId xmlns:a16="http://schemas.microsoft.com/office/drawing/2014/main" id="{9C2CB6AF-7970-0784-439D-9A9FB0FF05CA}"/>
-              </a:ext>
-            </a:extLst>
-          </p:cNvPr>
-          <p:cNvPicPr>
-            <a:picLocks noChangeAspect="1"/>
-          </p:cNvPicPr>
-          <p:nvPr/>
-        </p:nvPicPr>
-        <p:blipFill>
-          <a:blip r:embed="rId3"/>
-          <a:stretch>
-            <a:fillRect/>
-          </a:stretch>
-        </p:blipFill>
-        <p:spPr>
-          <a:xfrm>
-            <a:off x="6397512" y="3986467"/>
-            <a:ext cx="2227902" cy="2550440"/>
-          </a:xfrm>
-          <a:prstGeom prst="rect">
-            <a:avLst/>
-          </a:prstGeom>
-        </p:spPr>
-      </p:pic>
-      <p:pic>
-        <p:nvPicPr>
-          <p:cNvPr id="6" name="그림 7" descr="Cap 2014-06-19 09-38-54-334.png">
-            <a:extLst>
-              <a:ext uri="{FF2B5EF4-FFF2-40B4-BE49-F238E27FC236}">
-                <a16:creationId xmlns:a16="http://schemas.microsoft.com/office/drawing/2014/main" id="{9A7C9AD7-EF1F-BD7C-ACA5-6BB9D9F82AF1}"/>
-              </a:ext>
-            </a:extLst>
-          </p:cNvPr>
-          <p:cNvPicPr>
-            <a:picLocks noChangeAspect="1"/>
-          </p:cNvPicPr>
-          <p:nvPr/>
-        </p:nvPicPr>
-        <p:blipFill rotWithShape="1">
-          <a:blip r:embed="rId4">
-            <a:extLst>
-              <a:ext uri="{28A0092B-C50C-407E-A947-70E740481C1C}">
-                <a14:useLocalDpi xmlns:a14="http://schemas.microsoft.com/office/drawing/2010/main" val="0"/>
-              </a:ext>
-            </a:extLst>
-          </a:blip>
-          <a:srcRect l="50785" t="20886" r="6047" b="1954"/>
-          <a:stretch>
-            <a:fillRect/>
-          </a:stretch>
-        </p:blipFill>
-        <p:spPr bwMode="auto">
-          <a:xfrm>
-            <a:off x="8826616" y="1216404"/>
-            <a:ext cx="2533475" cy="2273416"/>
-          </a:xfrm>
-          <a:prstGeom prst="rect">
-            <a:avLst/>
-          </a:prstGeom>
-          <a:noFill/>
-          <a:ln>
-            <a:noFill/>
-          </a:ln>
-          <a:extLst>
-            <a:ext uri="{909E8E84-426E-40DD-AFC4-6F175D3DCCD1}">
-              <a14:hiddenFill xmlns:a14="http://schemas.microsoft.com/office/drawing/2010/main">
-                <a:solidFill>
-                  <a:srgbClr val="FFFFFF"/>
-                </a:solidFill>
-              </a14:hiddenFill>
-            </a:ext>
-            <a:ext uri="{91240B29-F687-4F45-9708-019B960494DF}">
-              <a14:hiddenLine xmlns:a14="http://schemas.microsoft.com/office/drawing/2010/main" w="9525">
-                <a:solidFill>
-                  <a:srgbClr val="000000"/>
-                </a:solidFill>
-                <a:miter lim="800000"/>
-                <a:headEnd/>
-                <a:tailEnd/>
-              </a14:hiddenLine>
-            </a:ext>
-          </a:extLst>
-        </p:spPr>
-      </p:pic>
-      <p:sp>
-        <p:nvSpPr>
-          <p:cNvPr id="10" name="TextBox 9">
-            <a:extLst>
-              <a:ext uri="{FF2B5EF4-FFF2-40B4-BE49-F238E27FC236}">
-                <a16:creationId xmlns:a16="http://schemas.microsoft.com/office/drawing/2014/main" id="{D47807CB-C3A1-18F2-F2D4-A3B9BA218C33}"/>
-              </a:ext>
-            </a:extLst>
-          </p:cNvPr>
-          <p:cNvSpPr txBox="1"/>
-          <p:nvPr/>
-        </p:nvSpPr>
-        <p:spPr>
-          <a:xfrm>
-            <a:off x="9388622" y="859709"/>
-            <a:ext cx="1512872" cy="276999"/>
-          </a:xfrm>
-          <a:prstGeom prst="rect">
-            <a:avLst/>
-          </a:prstGeom>
-          <a:noFill/>
-        </p:spPr>
-        <p:txBody>
-          <a:bodyPr wrap="square">
-            <a:spAutoFit/>
-          </a:bodyPr>
-          <a:lstStyle/>
-          <a:p>
-            <a:pPr algn="ctr"/>
-            <a:r>
-              <a:rPr lang="en-US" altLang="ko-KR" sz="1200" spc="-50" dirty="0"/>
-              <a:t>&lt;</a:t>
-            </a:r>
-            <a:r>
-              <a:rPr lang="ko-KR" altLang="en-US" sz="1200" spc="-50" dirty="0"/>
-              <a:t>최적 </a:t>
-            </a:r>
-            <a:r>
-              <a:rPr lang="ko-KR" altLang="en-US" sz="1200" spc="-50" dirty="0" err="1"/>
-              <a:t>저감량</a:t>
-            </a:r>
-            <a:r>
-              <a:rPr lang="en-US" altLang="ko-KR" sz="1200" spc="-50" dirty="0"/>
-              <a:t>&gt;</a:t>
-            </a:r>
-            <a:endParaRPr lang="ko-KR" altLang="en-US" sz="1400" dirty="0"/>
-          </a:p>
-        </p:txBody>
-      </p:sp>
-    </p:spTree>
-    <p:extLst>
-      <p:ext uri="{BB962C8B-B14F-4D97-AF65-F5344CB8AC3E}">
-        <p14:creationId xmlns:p14="http://schemas.microsoft.com/office/powerpoint/2010/main" val="4280919478"/>
-      </p:ext>
-    </p:extLst>
-  </p:cSld>
-  <p:clrMapOvr>
-    <a:masterClrMapping/>
-  </p:clrMapOvr>
-</p:sld>
-</file>
-
 <file path=ppt/slides/slide14.xml><?xml version="1.0" encoding="utf-8"?>
 <p:sld xmlns:a="http://schemas.openxmlformats.org/drawingml/2006/main" xmlns:r="http://schemas.openxmlformats.org/officeDocument/2006/relationships" xmlns:p="http://schemas.openxmlformats.org/presentationml/2006/main">
   <p:cSld>
